--- a/10-Knowledge-Products/KP1-GEA/videos/module_2/en/decks/KP1_M2_2.1_Deck_v0.2.pptx
+++ b/10-Knowledge-Products/KP1-GEA/videos/module_2/en/decks/KP1_M2_2.1_Deck_v0.2.pptx
@@ -14,7 +14,6 @@
     <p:handoutMasterId r:id="rId47"/>
   </p:handoutMasterIdLst>
   <p:sldIdLst>
-    <p:sldId id="2681" r:id="rId8"/>
     <p:sldId id="2696" r:id="rId18"/>
     <p:sldId id="2697" r:id="rId19"/>
     <p:sldId id="2698" r:id="rId20"/>
@@ -22,6 +21,7 @@
     <p:sldId id="2700" r:id="rId22"/>
     <p:sldId id="2701" r:id="rId23"/>
     <p:sldId id="2702" r:id="rId24"/>
+    <p:sldId id="2703" r:id="rId25"/>
   </p:sldIdLst>
   <p:sldSz cx="12192000" cy="6858000"/>
   <p:notesSz cx="6858000" cy="9144000"/>
@@ -888,7 +888,7 @@
 </p:notesMaster>
 </file>
 
-<file path=ppt/notesSlides/notesSlide21.xml><?xml version="1.0" encoding="utf-8"?>
+<file path=ppt/notesSlides/notesSlide10.xml><?xml version="1.0" encoding="utf-8"?>
 <p:notes xmlns:a="http://schemas.openxmlformats.org/drawingml/2006/main" xmlns:p="http://schemas.openxmlformats.org/presentationml/2006/main" xmlns:r="http://schemas.openxmlformats.org/officeDocument/2006/relationships">
   <p:cSld>
     <p:spTree>
@@ -933,7 +933,7 @@
           <a:lstStyle/>
           <a:p>
             <a:r>
-              <a:t>Title card for standalone video 2.1. Content slides are identical to the corresponding section of the combined deck KP1_M2_Deck_v0.2.pptx; voice-over is in each slide’s notes.</a:t>
+              <a:t>Sources slide, held ~5 seconds at the end of the video. Links are compiled into the YouTube description per ITU convention; no URLs read aloud.</a:t>
             </a:r>
           </a:p>
         </p:txBody>
@@ -1003,13 +1003,7 @@
           <a:lstStyle/>
           <a:p>
             <a:r>
-              <a:t>VO, slide 1: An Enterprise Architecture describes a government in four layers: Business, Data, Application, Technology. For each layer you need three things — the question it answers, the deliverable you produce, and the mistake that catches first-time architects.</a:t>
-            </a:r>
-          </a:p>
-          <a:p/>
-          <a:p>
-            <a:r>
-              <a:t>RETRIEVAL MOMENT: before the Business slide, ask the viewer to name the mistake they think catches first-time architects on each layer. The four answers are delivered on the next four slides, one per layer.</a:t>
+              <a:t>Title card — the cold open. The hosts name the module, the video number, the title and the single message on this slide; no scripted narration. Hold until the opener begins; the opener is narrated on the next slide.</a:t>
             </a:r>
           </a:p>
         </p:txBody>
@@ -1079,7 +1073,13 @@
           <a:lstStyle/>
           <a:p>
             <a:r>
-              <a:t>VO: Start with the Business layer. The question it answers: what does this body do, for whom, and how well? Not how it is organised inside — what it actually does. The deliverable is a capability map and a service catalogue. A capability is something the body can do — register a learner, run an examination, certify a teacher. A service is how a citizen or another body receives that capability. The mistake first-time architects make is to copy the organisation chart and call it the Business layer. The org chart tells you who reports to whom. It does not tell you what the body does. Two bodies with the same chart can do completely different work. Describe the capabilities, not the boxes.</a:t>
+              <a:t>VO: An Enterprise Architecture describes a government in four layers: Business, Data, Application, Technology. For each layer you need three things — the question it answers, the deliverable you produce, and the mistake that catches first-time architects.</a:t>
+            </a:r>
+          </a:p>
+          <a:p/>
+          <a:p>
+            <a:r>
+              <a:t>RETRIEVAL MOMENT: before the Business slide, ask the viewer to name the mistake they think catches first-time architects on each layer. The four answers are delivered on the next four slides, one per layer.</a:t>
             </a:r>
           </a:p>
         </p:txBody>
@@ -1149,13 +1149,7 @@
           <a:lstStyle/>
           <a:p>
             <a:r>
-              <a:t>VO: Second, the Data layer. The question: what information does the body hold, who owns each kind, and where does the authoritative copy live? The deliverable is a data-domain catalogue. A data domain is a kind of information the government agrees on — a person, a learner, a payment — and for each you name the one body that owns the authoritative copy. Data is the longest-lived layer: applications and technology cycle, the data outlasts them. The mistake is to list the databases you can see, one per system — but five systems may each hold their own version of the same learner. The Data layer sits above the databases: agreed domains, one owner each.</a:t>
-            </a:r>
-          </a:p>
-          <a:p/>
-          <a:p>
-            <a:r>
-              <a:t>Hold the one-owner-per-domain line a beat longer — it is the payload of this slide and the thing 2.5 makes concrete.</a:t>
+              <a:t>VO: Start with the Business layer. The question it answers: what does this body do, for whom, and how well? Not how it is organised inside — what it actually does. The deliverable is a capability map and a service catalogue. A capability is something the body can do — register a learner, run an examination, certify a teacher. A service is how a citizen or another body receives that capability. The mistake first-time architects make is to copy the organisation chart and call it the Business layer. The org chart tells you who reports to whom. It does not tell you what the body does. Two bodies with the same chart can do completely different work. Describe the capabilities, not the boxes.</a:t>
             </a:r>
           </a:p>
         </p:txBody>
@@ -1225,7 +1219,13 @@
           <a:lstStyle/>
           <a:p>
             <a:r>
-              <a:t>VO: Third, the Application layer. The question: what software supports the work, and which capability does each application serve? The deliverable is an application portfolio — every system, mapped to the capability it supports and the data domain it touches. The mistake here is producing a software inventory that lists names and versions but never connects them to what the body does. An inventory tells you that a system exists. A portfolio tells you why it exists, what would break if it failed, and whether two systems are quietly doing the same job. The link up to the Business layer and across to the Data layer is the whole value. Without it, you have an IT asset list, not an architecture.</a:t>
+              <a:t>VO: Second, the Data layer. The question: what information does the body hold, who owns each kind, and where does the authoritative copy live? The deliverable is a data-domain catalogue. A data domain is a kind of information the government agrees on — a person, a learner, a payment — and for each you name the one body that owns the authoritative copy. Data is the longest-lived layer: applications and technology cycle, the data outlasts them. The mistake is to list the databases you can see, one per system — but five systems may each hold their own version of the same learner. The Data layer sits above the databases: agreed domains, one owner each.</a:t>
+            </a:r>
+          </a:p>
+          <a:p/>
+          <a:p>
+            <a:r>
+              <a:t>Hold the one-owner-per-domain line a beat longer — it is the payload of this slide and the thing 2.5 makes concrete.</a:t>
             </a:r>
           </a:p>
         </p:txBody>
@@ -1295,13 +1295,7 @@
           <a:lstStyle/>
           <a:p>
             <a:r>
-              <a:t>VO: Fourth, the Technology layer. The question: what does all of this run on? Networks, hosting, the identity platform, the security controls, the data-exchange backbone. The deliverable is a short list of technology standards and a simple infrastructure picture — not a server-by-server audit. The mistake here is the opposite of the others. First-time architects go too deep, too early. They document every server and switch before they understand a single capability. At the architecture level, the Technology layer answers a few questions: what are we standardising on, where are the single points of failure, and what must be running for anything else to work. The detailed audit belongs to the operations team, not the architect.</a:t>
-            </a:r>
-          </a:p>
-          <a:p/>
-          <a:p>
-            <a:r>
-              <a:t>The contrast with the other three mistakes is the memorable beat — name it out loud.</a:t>
+              <a:t>VO: Third, the Application layer. The question: what software supports the work, and which capability does each application serve? The deliverable is an application portfolio — every system, mapped to the capability it supports and the data domain it touches. The mistake here is producing a software inventory that lists names and versions but never connects them to what the body does. An inventory tells you that a system exists. A portfolio tells you why it exists, what would break if it failed, and whether two systems are quietly doing the same job. The link up to the Business layer and across to the Data layer is the whole value. Without it, you have an IT asset list, not an architecture.</a:t>
             </a:r>
           </a:p>
         </p:txBody>
@@ -1371,19 +1365,13 @@
           <a:lstStyle/>
           <a:p>
             <a:r>
-              <a:t>PRACTICE BOX (on-screen only — never read it, never paraphrase it, never point at it). It replaces the narrated handoff: this video ends on the recap and the Sources slide.</a:t>
+              <a:t>VO: Fourth, the Technology layer. The question: what does all of this run on? Networks, hosting, the identity platform, the security controls, the data-exchange backbone. The deliverable is a short list of technology standards and a simple infrastructure picture — not a server-by-server audit. The mistake here is the opposite of the others. First-time architects go too deep, too early. They document every server and switch before they understand a single capability. At the architecture level, the Technology layer answers a few questions: what are we standardising on, where are the single points of failure, and what must be running for anything else to work. The detailed audit belongs to the operations team, not the architect.</a:t>
             </a:r>
           </a:p>
           <a:p/>
           <a:p>
             <a:r>
-              <a:t>VO: The four layers are not four separate documents. They connect. Every service traces to a capability in the Business layer. Every capability is served by one or more applications. Every application uses one or more data domains, and both run on the technology layer. When you can trace a citizen-facing service down to the infrastructure it depends on, you are reading the government as a system — which is the whole job. A layer that floats free, with no connection up or down, is the first gap you have found.</a:t>
-            </a:r>
-          </a:p>
-          <a:p/>
-          <a:p>
-            <a:r>
-              <a:t>Centrepiece and recap of 2.1 — reveal one band at a time, top to bottom, then hold the closing line.</a:t>
+              <a:t>The contrast with the other three mistakes is the memorable beat — name it out loud.</a:t>
             </a:r>
           </a:p>
         </p:txBody>
@@ -1453,7 +1441,19 @@
           <a:lstStyle/>
           <a:p>
             <a:r>
-              <a:t>Sources slide, held ~5 seconds at the end of the video. Links are compiled into the YouTube description per ITU convention; no URLs read aloud.</a:t>
+              <a:t>PRACTICE BOX (on-screen only — never read it, never paraphrase it, never point at it). It replaces the narrated handoff: this video ends on the recap and the Sources slide.</a:t>
+            </a:r>
+          </a:p>
+          <a:p/>
+          <a:p>
+            <a:r>
+              <a:t>VO: The four layers are not four separate documents. They connect. Every service traces to a capability in the Business layer. Every capability is served by one or more applications. Every application uses one or more data domains, and both run on the technology layer. When you can trace a citizen-facing service down to the infrastructure it depends on, you are reading the government as a system — which is the whole job. A layer that floats free, with no connection up or down, is the first gap you have found.</a:t>
+            </a:r>
+          </a:p>
+          <a:p/>
+          <a:p>
+            <a:r>
+              <a:t>Centrepiece and recap of 2.1 — reveal one band at a time, top to bottom, then hold the closing line.</a:t>
             </a:r>
           </a:p>
         </p:txBody>
@@ -11614,8 +11614,8 @@
 </p:sldMaster>
 </file>
 
-<file path=ppt/slides/slide1.xml><?xml version="1.0" encoding="utf-8"?>
-<p:sld xmlns:a="http://schemas.openxmlformats.org/drawingml/2006/main" xmlns:r="http://schemas.openxmlformats.org/officeDocument/2006/relationships" xmlns:p="http://schemas.openxmlformats.org/presentationml/2006/main">
+<file path=ppt/slides/slide10.xml><?xml version="1.0" encoding="utf-8"?>
+<p:sld xmlns:a="http://schemas.openxmlformats.org/drawingml/2006/main" xmlns:p="http://schemas.openxmlformats.org/presentationml/2006/main" xmlns:r="http://schemas.openxmlformats.org/officeDocument/2006/relationships">
   <p:cSld>
     <p:spTree>
       <p:nvGrpSpPr>
@@ -11623,319 +11623,17 @@
         <p:cNvGrpSpPr/>
         <p:nvPr/>
       </p:nvGrpSpPr>
-      <p:grpSpPr>
-        <a:xfrm>
-          <a:off x="0" y="0"/>
-          <a:ext cx="0" cy="0"/>
-          <a:chOff x="0" y="0"/>
-          <a:chExt cx="0" cy="0"/>
-        </a:xfrm>
-      </p:grpSpPr>
-      <p:cxnSp>
-        <p:nvCxnSpPr>
-          <p:cNvPr id="11" name="Straight Connector 10">
-            <a:extLst>
-              <a:ext uri="{FF2B5EF4-FFF2-40B4-BE49-F238E27FC236}">
-                <a16:creationId xmlns:a16="http://schemas.microsoft.com/office/drawing/2014/main" id="{D9AD66F2-F7C0-4D03-9150-D28F17AC561D}"/>
-              </a:ext>
-            </a:extLst>
-          </p:cNvPr>
-          <p:cNvCxnSpPr>
-            <a:cxnSpLocks/>
-          </p:cNvCxnSpPr>
-          <p:nvPr/>
-        </p:nvCxnSpPr>
-        <p:spPr>
-          <a:xfrm>
-            <a:off x="373021" y="2198718"/>
-            <a:ext cx="6843567" cy="0"/>
-          </a:xfrm>
-          <a:prstGeom prst="line">
-            <a:avLst/>
-          </a:prstGeom>
-          <a:ln w="12700">
-            <a:solidFill>
-              <a:srgbClr val="009CD6"/>
-            </a:solidFill>
-          </a:ln>
-        </p:spPr>
-        <p:style>
-          <a:lnRef idx="1">
-            <a:schemeClr val="accent1"/>
-          </a:lnRef>
-          <a:fillRef idx="0">
-            <a:schemeClr val="accent1"/>
-          </a:fillRef>
-          <a:effectRef idx="0">
-            <a:schemeClr val="accent1"/>
-          </a:effectRef>
-          <a:fontRef idx="minor">
-            <a:schemeClr val="tx1"/>
-          </a:fontRef>
-        </p:style>
-      </p:cxnSp>
-      <p:sp>
-        <p:nvSpPr>
-          <p:cNvPr id="12" name="Title 9">
-            <a:extLst>
-              <a:ext uri="{FF2B5EF4-FFF2-40B4-BE49-F238E27FC236}">
-                <a16:creationId xmlns:a16="http://schemas.microsoft.com/office/drawing/2014/main" id="{EEB08032-CE0E-4986-AEDF-A41026C0E8B9}"/>
-              </a:ext>
-            </a:extLst>
-          </p:cNvPr>
-          <p:cNvSpPr txBox="1">
-            <a:spLocks/>
-          </p:cNvSpPr>
-          <p:nvPr/>
-        </p:nvSpPr>
-        <p:spPr>
-          <a:xfrm>
-            <a:off x="237734" y="702833"/>
-            <a:ext cx="6432007" cy="1218817"/>
-          </a:xfrm>
-          <a:prstGeom prst="rect">
-            <a:avLst/>
-          </a:prstGeom>
-        </p:spPr>
-        <p:txBody>
-          <a:bodyPr anchor="b">
-            <a:noAutofit/>
-          </a:bodyPr>
-          <a:lstStyle>
-            <a:lvl1pPr algn="l" defTabSz="914400" rtl="0" eaLnBrk="1" latinLnBrk="0" hangingPunct="1">
-              <a:lnSpc>
-                <a:spcPct val="90000"/>
-              </a:lnSpc>
-              <a:spcBef>
-                <a:spcPct val="0"/>
-              </a:spcBef>
-              <a:buNone/>
-              <a:defRPr sz="4000" kern="1200">
-                <a:solidFill>
-                  <a:schemeClr val="bg1"/>
-                </a:solidFill>
-                <a:latin typeface="Arial" panose="020B0604020202020204" pitchFamily="34" charset="0"/>
-                <a:ea typeface="+mj-ea"/>
-                <a:cs typeface="Arial" panose="020B0604020202020204" pitchFamily="34" charset="0"/>
-              </a:defRPr>
-            </a:lvl1pPr>
-          </a:lstStyle>
-          <a:p>
-            <a:r>
-              <a:rPr sz="2800" b="1" i="0">
-                <a:solidFill>
-                  <a:srgbClr val="1A1A1A"/>
-                </a:solidFill>
-                <a:latin typeface="Arial"/>
-              </a:rPr>
-              <a:t>2.1 — Read any government in four layers</a:t>
-            </a:r>
-          </a:p>
-        </p:txBody>
-      </p:sp>
-      <p:pic>
-        <p:nvPicPr>
-          <p:cNvPr id="7" name="Picture 6">
-            <a:extLst>
-              <a:ext uri="{FF2B5EF4-FFF2-40B4-BE49-F238E27FC236}">
-                <a16:creationId xmlns:a16="http://schemas.microsoft.com/office/drawing/2014/main" id="{A2066351-C569-4C4C-A096-308777FCDC32}"/>
-              </a:ext>
-            </a:extLst>
-          </p:cNvPr>
-          <p:cNvPicPr>
-            <a:picLocks noChangeAspect="1"/>
-          </p:cNvPicPr>
-          <p:nvPr/>
-        </p:nvPicPr>
-        <p:blipFill>
-          <a:blip r:embed="rId2">
-            <a:extLst>
-              <a:ext uri="{28A0092B-C50C-407E-A947-70E740481C1C}">
-                <a14:useLocalDpi xmlns:a14="http://schemas.microsoft.com/office/drawing/2010/main" val="0"/>
-              </a:ext>
-            </a:extLst>
-          </a:blip>
-          <a:srcRect t="20219" b="14729"/>
-          <a:stretch>
-            <a:fillRect/>
-          </a:stretch>
-        </p:blipFill>
-        <p:spPr>
-          <a:xfrm>
-            <a:off x="0" y="5620871"/>
-            <a:ext cx="1323975" cy="1218816"/>
-          </a:xfrm>
-          <a:prstGeom prst="rect">
-            <a:avLst/>
-          </a:prstGeom>
-        </p:spPr>
-      </p:pic>
-      <p:sp>
-        <p:nvSpPr>
-          <p:cNvPr id="14" name="Title 9">
-            <a:extLst>
-              <a:ext uri="{FF2B5EF4-FFF2-40B4-BE49-F238E27FC236}">
-                <a16:creationId xmlns:a16="http://schemas.microsoft.com/office/drawing/2014/main" id="{B5087B80-3EE4-1881-0130-ED58CA625092}"/>
-              </a:ext>
-            </a:extLst>
-          </p:cNvPr>
-          <p:cNvSpPr txBox="1">
-            <a:spLocks/>
-          </p:cNvSpPr>
-          <p:nvPr/>
-        </p:nvSpPr>
-        <p:spPr>
-          <a:xfrm>
-            <a:off x="284452" y="2475786"/>
-            <a:ext cx="6382893" cy="953213"/>
-          </a:xfrm>
-          <a:prstGeom prst="rect">
-            <a:avLst/>
-          </a:prstGeom>
-        </p:spPr>
-        <p:txBody>
-          <a:bodyPr anchor="t">
-            <a:noAutofit/>
-          </a:bodyPr>
-          <a:lstStyle>
-            <a:lvl1pPr algn="l" defTabSz="914400" rtl="0" eaLnBrk="1" latinLnBrk="0" hangingPunct="1">
-              <a:lnSpc>
-                <a:spcPct val="90000"/>
-              </a:lnSpc>
-              <a:spcBef>
-                <a:spcPct val="0"/>
-              </a:spcBef>
-              <a:buNone/>
-              <a:defRPr sz="4000" kern="1200">
-                <a:solidFill>
-                  <a:schemeClr val="bg1"/>
-                </a:solidFill>
-                <a:latin typeface="Arial" panose="020B0604020202020204" pitchFamily="34" charset="0"/>
-                <a:ea typeface="+mj-ea"/>
-                <a:cs typeface="Arial" panose="020B0604020202020204" pitchFamily="34" charset="0"/>
-              </a:defRPr>
-            </a:lvl1pPr>
-          </a:lstStyle>
-          <a:p>
-            <a:pPr marL="0" marR="0" lvl="0" indent="0" rtl="0">
-              <a:spcBef>
-                <a:spcPts val="600"/>
-              </a:spcBef>
-              <a:spcAft>
-                <a:spcPts val="0"/>
-              </a:spcAft>
-              <a:buNone/>
-            </a:pPr>
-            <a:r>
-              <a:rPr sz="1300" b="1" i="0">
-                <a:solidFill>
-                  <a:srgbClr val="006E96"/>
-                </a:solidFill>
-                <a:latin typeface="Arial"/>
-              </a:rPr>
-              <a:t>KP1 · Government Enterprise Architecture · Module 2 · Video 2.1</a:t>
-            </a:r>
-          </a:p>
-          <a:p>
-            <a:r>
-              <a:rPr sz="1200" b="0" i="1">
-                <a:solidFill>
-                  <a:srgbClr val="595959"/>
-                </a:solidFill>
-                <a:latin typeface="Arial"/>
-              </a:rPr>
-              <a:t>Every government, in any sector, can be read in four layers — Business, Data, Application, Technology. Learn the question each layer answers, the deliverable it produces, and the mistake first-time architects make, and you can decompose any ministry put in front of you.</a:t>
-            </a:r>
-          </a:p>
-        </p:txBody>
-      </p:sp>
-      <p:sp>
-        <p:nvSpPr>
-          <p:cNvPr id="17" name="Title 9">
-            <a:extLst>
-              <a:ext uri="{FF2B5EF4-FFF2-40B4-BE49-F238E27FC236}">
-                <a16:creationId xmlns:a16="http://schemas.microsoft.com/office/drawing/2014/main" id="{5E8796F7-DD26-D250-5E97-B38B22298E72}"/>
-              </a:ext>
-            </a:extLst>
-          </p:cNvPr>
-          <p:cNvSpPr txBox="1">
-            <a:spLocks/>
-          </p:cNvSpPr>
-          <p:nvPr/>
-        </p:nvSpPr>
-        <p:spPr>
-          <a:xfrm>
-            <a:off x="284452" y="4363897"/>
-            <a:ext cx="6382893" cy="953213"/>
-          </a:xfrm>
-          <a:prstGeom prst="rect">
-            <a:avLst/>
-          </a:prstGeom>
-        </p:spPr>
-        <p:txBody>
-          <a:bodyPr anchor="t">
-            <a:noAutofit/>
-          </a:bodyPr>
-          <a:lstStyle>
-            <a:lvl1pPr algn="l" defTabSz="914400" rtl="0" eaLnBrk="1" latinLnBrk="0" hangingPunct="1">
-              <a:lnSpc>
-                <a:spcPct val="90000"/>
-              </a:lnSpc>
-              <a:spcBef>
-                <a:spcPct val="0"/>
-              </a:spcBef>
-              <a:buNone/>
-              <a:defRPr sz="4000" kern="1200">
-                <a:solidFill>
-                  <a:schemeClr val="bg1"/>
-                </a:solidFill>
-                <a:latin typeface="Arial" panose="020B0604020202020204" pitchFamily="34" charset="0"/>
-                <a:ea typeface="+mj-ea"/>
-                <a:cs typeface="Arial" panose="020B0604020202020204" pitchFamily="34" charset="0"/>
-              </a:defRPr>
-            </a:lvl1pPr>
-          </a:lstStyle>
-          <a:p>
-            <a:pPr marL="0" marR="0" lvl="0" indent="0" rtl="0">
-              <a:spcBef>
-                <a:spcPts val="600"/>
-              </a:spcBef>
-              <a:spcAft>
-                <a:spcPts val="1200"/>
-              </a:spcAft>
-              <a:buNone/>
-            </a:pPr>
-            <a:r>
-              <a:rPr sz="1400" b="1" i="0">
-                <a:solidFill>
-                  <a:srgbClr val="1A1A1A"/>
-                </a:solidFill>
-                <a:latin typeface="Arial"/>
-              </a:rPr>
-              <a:t>Target audience: </a:t>
-            </a:r>
-            <a:r>
-              <a:rPr sz="1400" b="0" i="0">
-                <a:solidFill>
-                  <a:srgbClr val="1A1A1A"/>
-                </a:solidFill>
-                <a:latin typeface="Arial"/>
-              </a:rPr>
-              <a:t>Chief architect · senior architect · sector ICT lead</a:t>
-            </a:r>
-          </a:p>
-        </p:txBody>
-      </p:sp>
-      <p:sp>
-        <p:nvSpPr>
-          <p:cNvPr id="18" name="Rectangle 17"/>
+      <p:grpSpPr/>
+      <p:sp>
+        <p:nvSpPr>
+          <p:cNvPr id="2" name="Rectangle 1"/>
           <p:cNvSpPr/>
           <p:nvPr/>
         </p:nvSpPr>
         <p:spPr>
           <a:xfrm>
-            <a:off x="7022592" y="0"/>
-            <a:ext cx="5169103" cy="6858000"/>
+            <a:off x="457200" y="384048"/>
+            <a:ext cx="45720" cy="256032"/>
           </a:xfrm>
           <a:prstGeom prst="rect">
             <a:avLst/>
@@ -11972,14 +11670,14 @@
       </p:sp>
       <p:sp>
         <p:nvSpPr>
-          <p:cNvPr id="19" name="TextBox 18"/>
+          <p:cNvPr id="3" name="TextBox 2"/>
           <p:cNvSpPr txBox="1"/>
           <p:nvPr/>
         </p:nvSpPr>
         <p:spPr>
           <a:xfrm>
-            <a:off x="7452360" y="457200"/>
-            <a:ext cx="4297680" cy="457200"/>
+            <a:off x="621792" y="274320"/>
+            <a:ext cx="11247120" cy="914400"/>
           </a:xfrm>
           <a:prstGeom prst="rect">
             <a:avLst/>
@@ -11993,247 +11691,82 @@
           <a:lstStyle/>
           <a:p>
             <a:r>
-              <a:rPr sz="1100" b="1" i="0">
-                <a:solidFill>
-                  <a:srgbClr val="E5F5FB"/>
-                </a:solidFill>
-                <a:latin typeface="Arial"/>
-              </a:rPr>
-              <a:t>THE FOUR LAYERS THIS MODULE TEACHES</a:t>
-            </a:r>
-          </a:p>
-        </p:txBody>
-      </p:sp>
-      <p:sp>
-        <p:nvSpPr>
-          <p:cNvPr id="20" name="Rounded Rectangle 19"/>
-          <p:cNvSpPr/>
-          <p:nvPr/>
-        </p:nvSpPr>
-        <p:spPr>
-          <a:xfrm>
-            <a:off x="7452360" y="960120"/>
-            <a:ext cx="3840480" cy="658368"/>
-          </a:xfrm>
-          <a:prstGeom prst="roundRect">
-            <a:avLst>
-              <a:gd name="adj" fmla="val 14000"/>
-            </a:avLst>
-          </a:prstGeom>
-          <a:solidFill>
-            <a:srgbClr val="FFFFFF"/>
-          </a:solidFill>
-          <a:ln>
-            <a:noFill/>
-          </a:ln>
-          <a:effectLst/>
-        </p:spPr>
-        <p:style>
-          <a:lnRef idx="1">
-            <a:schemeClr val="accent1"/>
-          </a:lnRef>
-          <a:fillRef idx="3">
-            <a:schemeClr val="accent1"/>
-          </a:fillRef>
-          <a:effectRef idx="2">
-            <a:schemeClr val="accent1"/>
-          </a:effectRef>
-          <a:fontRef idx="minor">
-            <a:schemeClr val="lt1"/>
-          </a:fontRef>
-        </p:style>
-        <p:txBody>
-          <a:bodyPr rtlCol="0" anchor="ctr" lIns="164592" wrap="square"/>
-          <a:lstStyle/>
-          <a:p>
-            <a:pPr algn="ctr"/>
-            <a:r>
-              <a:rPr sz="1500" b="1" i="0">
+              <a:rPr sz="2800" b="1" i="0">
                 <a:solidFill>
                   <a:srgbClr val="1A1A1A"/>
                 </a:solidFill>
                 <a:latin typeface="Arial"/>
               </a:rPr>
-              <a:t>Business — what the body does</a:t>
-            </a:r>
-          </a:p>
-        </p:txBody>
-      </p:sp>
-      <p:sp>
-        <p:nvSpPr>
-          <p:cNvPr id="21" name="Rounded Rectangle 20"/>
-          <p:cNvSpPr/>
+              <a:t>Sources</a:t>
+            </a:r>
+          </a:p>
+        </p:txBody>
+      </p:sp>
+      <p:sp>
+        <p:nvSpPr>
+          <p:cNvPr id="4" name="TextBox 3"/>
+          <p:cNvSpPr txBox="1"/>
           <p:nvPr/>
         </p:nvSpPr>
         <p:spPr>
           <a:xfrm>
-            <a:off x="7452360" y="1892808"/>
-            <a:ext cx="3840480" cy="658368"/>
-          </a:xfrm>
-          <a:prstGeom prst="roundRect">
-            <a:avLst>
-              <a:gd name="adj" fmla="val 14000"/>
-            </a:avLst>
+            <a:off x="658368" y="1554480"/>
+            <a:ext cx="10789920" cy="3840480"/>
+          </a:xfrm>
+          <a:prstGeom prst="rect">
+            <a:avLst/>
           </a:prstGeom>
-          <a:solidFill>
-            <a:srgbClr val="FFFFFF"/>
-          </a:solidFill>
-          <a:ln>
-            <a:noFill/>
-          </a:ln>
-          <a:effectLst/>
-        </p:spPr>
-        <p:style>
-          <a:lnRef idx="1">
-            <a:schemeClr val="accent1"/>
-          </a:lnRef>
-          <a:fillRef idx="3">
-            <a:schemeClr val="accent1"/>
-          </a:fillRef>
-          <a:effectRef idx="2">
-            <a:schemeClr val="accent1"/>
-          </a:effectRef>
-          <a:fontRef idx="minor">
-            <a:schemeClr val="lt1"/>
-          </a:fontRef>
-        </p:style>
-        <p:txBody>
-          <a:bodyPr rtlCol="0" anchor="ctr" lIns="164592" wrap="square"/>
+          <a:noFill/>
+        </p:spPr>
+        <p:txBody>
+          <a:bodyPr wrap="square">
+            <a:spAutoFit/>
+          </a:bodyPr>
           <a:lstStyle/>
           <a:p>
-            <a:pPr algn="ctr"/>
-            <a:r>
-              <a:rPr sz="1500" b="1" i="0">
+            <a:pPr>
+              <a:spcAft>
+                <a:spcPts val="1200"/>
+              </a:spcAft>
+            </a:pPr>
+            <a:r>
+              <a:rPr sz="1700" b="0" i="0">
                 <a:solidFill>
                   <a:srgbClr val="1A1A1A"/>
                 </a:solidFill>
                 <a:latin typeface="Arial"/>
               </a:rPr>
-              <a:t>Data — what it holds, who owns it</a:t>
-            </a:r>
-          </a:p>
-        </p:txBody>
-      </p:sp>
-      <p:sp>
-        <p:nvSpPr>
-          <p:cNvPr id="22" name="Rounded Rectangle 21"/>
-          <p:cNvSpPr/>
-          <p:nvPr/>
-        </p:nvSpPr>
-        <p:spPr>
-          <a:xfrm>
-            <a:off x="7452360" y="2825496"/>
-            <a:ext cx="3840480" cy="658368"/>
-          </a:xfrm>
-          <a:prstGeom prst="roundRect">
-            <a:avLst>
-              <a:gd name="adj" fmla="val 14000"/>
-            </a:avLst>
-          </a:prstGeom>
-          <a:solidFill>
-            <a:srgbClr val="FFFFFF"/>
-          </a:solidFill>
-          <a:ln>
-            <a:noFill/>
-          </a:ln>
-          <a:effectLst/>
-        </p:spPr>
-        <p:style>
-          <a:lnRef idx="1">
-            <a:schemeClr val="accent1"/>
-          </a:lnRef>
-          <a:fillRef idx="3">
-            <a:schemeClr val="accent1"/>
-          </a:fillRef>
-          <a:effectRef idx="2">
-            <a:schemeClr val="accent1"/>
-          </a:effectRef>
-          <a:fontRef idx="minor">
-            <a:schemeClr val="lt1"/>
-          </a:fontRef>
-        </p:style>
-        <p:txBody>
-          <a:bodyPr rtlCol="0" anchor="ctr" lIns="164592" wrap="square"/>
-          <a:lstStyle/>
-          <a:p>
-            <a:pPr algn="ctr"/>
-            <a:r>
-              <a:rPr sz="1500" b="1" i="0">
+              <a:t>•  PAERA v1.0 — Annex 2 (Metamodel)</a:t>
+            </a:r>
+          </a:p>
+          <a:p>
+            <a:pPr>
+              <a:spcAft>
+                <a:spcPts val="1200"/>
+              </a:spcAft>
+            </a:pPr>
+            <a:r>
+              <a:rPr sz="1700" b="0" i="0">
                 <a:solidFill>
                   <a:srgbClr val="1A1A1A"/>
                 </a:solidFill>
                 <a:latin typeface="Arial"/>
               </a:rPr>
-              <a:t>Application — what supports the work</a:t>
-            </a:r>
-          </a:p>
-        </p:txBody>
-      </p:sp>
-      <p:sp>
-        <p:nvSpPr>
-          <p:cNvPr id="23" name="Rounded Rectangle 22"/>
-          <p:cNvSpPr/>
-          <p:nvPr/>
-        </p:nvSpPr>
-        <p:spPr>
-          <a:xfrm>
-            <a:off x="7452360" y="3758184"/>
-            <a:ext cx="3840480" cy="658368"/>
-          </a:xfrm>
-          <a:prstGeom prst="roundRect">
-            <a:avLst>
-              <a:gd name="adj" fmla="val 14000"/>
-            </a:avLst>
-          </a:prstGeom>
-          <a:solidFill>
-            <a:srgbClr val="006E96"/>
-          </a:solidFill>
-          <a:ln>
-            <a:noFill/>
-          </a:ln>
-          <a:effectLst/>
-        </p:spPr>
-        <p:style>
-          <a:lnRef idx="1">
-            <a:schemeClr val="accent1"/>
-          </a:lnRef>
-          <a:fillRef idx="3">
-            <a:schemeClr val="accent1"/>
-          </a:fillRef>
-          <a:effectRef idx="2">
-            <a:schemeClr val="accent1"/>
-          </a:effectRef>
-          <a:fontRef idx="minor">
-            <a:schemeClr val="lt1"/>
-          </a:fontRef>
-        </p:style>
-        <p:txBody>
-          <a:bodyPr rtlCol="0" anchor="ctr" lIns="164592" wrap="square"/>
-          <a:lstStyle/>
-          <a:p>
-            <a:pPr algn="ctr"/>
-            <a:r>
-              <a:rPr sz="1500" b="1" i="0">
-                <a:solidFill>
-                  <a:srgbClr val="FFFFFF"/>
-                </a:solidFill>
-                <a:latin typeface="Arial"/>
-              </a:rPr>
-              <a:t>Technology — what it all runs on</a:t>
-            </a:r>
-          </a:p>
-        </p:txBody>
-      </p:sp>
-      <p:sp>
-        <p:nvSpPr>
-          <p:cNvPr id="24" name="TextBox 23"/>
+              <a:t>•  PAERA v1.0 — §2.3 (Role of Enterprise Architecture)</a:t>
+            </a:r>
+          </a:p>
+        </p:txBody>
+      </p:sp>
+      <p:sp>
+        <p:nvSpPr>
+          <p:cNvPr id="5" name="TextBox 4"/>
           <p:cNvSpPr txBox="1"/>
           <p:nvPr/>
         </p:nvSpPr>
         <p:spPr>
           <a:xfrm>
-            <a:off x="7452360" y="5806440"/>
-            <a:ext cx="4297680" cy="731520"/>
+            <a:off x="658368" y="5806440"/>
+            <a:ext cx="10789920" cy="457200"/>
           </a:xfrm>
           <a:prstGeom prst="rect">
             <a:avLst/>
@@ -12247,23 +11780,52 @@
           <a:lstStyle/>
           <a:p>
             <a:r>
-              <a:rPr sz="1200" b="0" i="0">
+              <a:rPr sz="1400" b="1" i="0">
                 <a:solidFill>
-                  <a:srgbClr val="FFFFFF"/>
+                  <a:srgbClr val="006E96"/>
                 </a:solidFill>
                 <a:latin typeface="Arial"/>
               </a:rPr>
-              <a:t>6 shared entities · 10 principles to adopt · 2 traps to catch at Assess</a:t>
+              <a:t>Find the link in the description.</a:t>
+            </a:r>
+          </a:p>
+        </p:txBody>
+      </p:sp>
+      <p:sp>
+        <p:nvSpPr>
+          <p:cNvPr id="6" name="TextBox 5"/>
+          <p:cNvSpPr txBox="1"/>
+          <p:nvPr/>
+        </p:nvSpPr>
+        <p:spPr>
+          <a:xfrm>
+            <a:off x="457200" y="6473952"/>
+            <a:ext cx="7772400" cy="292608"/>
+          </a:xfrm>
+          <a:prstGeom prst="rect">
+            <a:avLst/>
+          </a:prstGeom>
+          <a:noFill/>
+        </p:spPr>
+        <p:txBody>
+          <a:bodyPr wrap="square">
+            <a:spAutoFit/>
+          </a:bodyPr>
+          <a:lstStyle/>
+          <a:p>
+            <a:r>
+              <a:rPr sz="900" b="0" i="0">
+                <a:solidFill>
+                  <a:srgbClr val="595959"/>
+                </a:solidFill>
+                <a:latin typeface="Arial"/>
+              </a:rPr>
+              <a:t>2.1 · Read any government in four layers</a:t>
             </a:r>
           </a:p>
         </p:txBody>
       </p:sp>
     </p:spTree>
-    <p:extLst>
-      <p:ext uri="{BB962C8B-B14F-4D97-AF65-F5344CB8AC3E}">
-        <p14:creationId xmlns:p14="http://schemas.microsoft.com/office/powerpoint/2010/main" val="1196800265"/>
-      </p:ext>
-    </p:extLst>
   </p:cSld>
   <p:clrMapOvr>
     <a:masterClrMapping/>
@@ -12471,58 +12033,14 @@
       <p:grpSpPr/>
       <p:sp>
         <p:nvSpPr>
-          <p:cNvPr id="2" name="Rectangle 1"/>
-          <p:cNvSpPr/>
-          <p:nvPr/>
-        </p:nvSpPr>
-        <p:spPr>
-          <a:xfrm>
-            <a:off x="457200" y="384048"/>
-            <a:ext cx="45720" cy="256032"/>
-          </a:xfrm>
-          <a:prstGeom prst="rect">
-            <a:avLst/>
-          </a:prstGeom>
-          <a:solidFill>
-            <a:srgbClr val="009CD6"/>
-          </a:solidFill>
-          <a:ln>
-            <a:noFill/>
-          </a:ln>
-          <a:effectLst/>
-        </p:spPr>
-        <p:style>
-          <a:lnRef idx="1">
-            <a:schemeClr val="accent1"/>
-          </a:lnRef>
-          <a:fillRef idx="3">
-            <a:schemeClr val="accent1"/>
-          </a:fillRef>
-          <a:effectRef idx="2">
-            <a:schemeClr val="accent1"/>
-          </a:effectRef>
-          <a:fontRef idx="minor">
-            <a:schemeClr val="lt1"/>
-          </a:fontRef>
-        </p:style>
-        <p:txBody>
-          <a:bodyPr rtlCol="0" anchor="ctr"/>
-          <a:lstStyle/>
-          <a:p>
-            <a:pPr algn="ctr"/>
-          </a:p>
-        </p:txBody>
-      </p:sp>
-      <p:sp>
-        <p:nvSpPr>
-          <p:cNvPr id="3" name="TextBox 2"/>
+          <p:cNvPr id="2" name="TextBox 1"/>
           <p:cNvSpPr txBox="1"/>
           <p:nvPr/>
         </p:nvSpPr>
         <p:spPr>
           <a:xfrm>
-            <a:off x="621792" y="274320"/>
-            <a:ext cx="11247120" cy="914400"/>
+            <a:off x="1005840" y="1325880"/>
+            <a:ext cx="5486400" cy="365760"/>
           </a:xfrm>
           <a:prstGeom prst="rect">
             <a:avLst/>
@@ -12536,257 +12054,61 @@
           <a:lstStyle/>
           <a:p>
             <a:r>
-              <a:rPr sz="2800" b="1" i="0">
+              <a:rPr sz="1200" b="1" i="0">
+                <a:solidFill>
+                  <a:srgbClr val="006E96"/>
+                </a:solidFill>
+                <a:latin typeface="Arial"/>
+              </a:rPr>
+              <a:t>WHERE WE START</a:t>
+            </a:r>
+          </a:p>
+        </p:txBody>
+      </p:sp>
+      <p:sp>
+        <p:nvSpPr>
+          <p:cNvPr id="3" name="TextBox 2"/>
+          <p:cNvSpPr txBox="1"/>
+          <p:nvPr/>
+        </p:nvSpPr>
+        <p:spPr>
+          <a:xfrm>
+            <a:off x="1005840" y="1783080"/>
+            <a:ext cx="10149840" cy="1737360"/>
+          </a:xfrm>
+          <a:prstGeom prst="rect">
+            <a:avLst/>
+          </a:prstGeom>
+          <a:noFill/>
+        </p:spPr>
+        <p:txBody>
+          <a:bodyPr wrap="square">
+            <a:spAutoFit/>
+          </a:bodyPr>
+          <a:lstStyle/>
+          <a:p>
+            <a:r>
+              <a:rPr sz="3000" b="1" i="0">
                 <a:solidFill>
                   <a:srgbClr val="1A1A1A"/>
                 </a:solidFill>
                 <a:latin typeface="Arial"/>
               </a:rPr>
-              <a:t>The Business layer describes what a body does — not how it is arranged</a:t>
-            </a:r>
-          </a:p>
-        </p:txBody>
-      </p:sp>
-      <p:sp>
-        <p:nvSpPr>
-          <p:cNvPr id="4" name="Rounded Rectangle 3"/>
-          <p:cNvSpPr/>
-          <p:nvPr/>
-        </p:nvSpPr>
-        <p:spPr>
-          <a:xfrm>
-            <a:off x="7360920" y="1207008"/>
-            <a:ext cx="841248" cy="310896"/>
-          </a:xfrm>
-          <a:prstGeom prst="roundRect">
-            <a:avLst>
-              <a:gd name="adj" fmla="val 35000"/>
-            </a:avLst>
-          </a:prstGeom>
-          <a:solidFill>
-            <a:srgbClr val="009CD6"/>
-          </a:solidFill>
-          <a:ln>
-            <a:noFill/>
-          </a:ln>
-          <a:effectLst/>
-        </p:spPr>
-        <p:style>
-          <a:lnRef idx="1">
-            <a:schemeClr val="accent1"/>
-          </a:lnRef>
-          <a:fillRef idx="3">
-            <a:schemeClr val="accent1"/>
-          </a:fillRef>
-          <a:effectRef idx="2">
-            <a:schemeClr val="accent1"/>
-          </a:effectRef>
-          <a:fontRef idx="minor">
-            <a:schemeClr val="lt1"/>
-          </a:fontRef>
-        </p:style>
-        <p:txBody>
-          <a:bodyPr rtlCol="0" anchor="ctr"/>
-          <a:lstStyle/>
-          <a:p>
-            <a:pPr algn="ctr"/>
-          </a:p>
-        </p:txBody>
-      </p:sp>
-      <p:sp>
-        <p:nvSpPr>
-          <p:cNvPr id="5" name="Rounded Rectangle 4"/>
-          <p:cNvSpPr/>
-          <p:nvPr/>
-        </p:nvSpPr>
-        <p:spPr>
-          <a:xfrm>
-            <a:off x="8257032" y="1207008"/>
-            <a:ext cx="841248" cy="310896"/>
-          </a:xfrm>
-          <a:prstGeom prst="roundRect">
-            <a:avLst>
-              <a:gd name="adj" fmla="val 35000"/>
-            </a:avLst>
-          </a:prstGeom>
-          <a:solidFill>
-            <a:srgbClr val="E5F5FB"/>
-          </a:solidFill>
-          <a:ln>
-            <a:noFill/>
-          </a:ln>
-          <a:effectLst/>
-        </p:spPr>
-        <p:style>
-          <a:lnRef idx="1">
-            <a:schemeClr val="accent1"/>
-          </a:lnRef>
-          <a:fillRef idx="3">
-            <a:schemeClr val="accent1"/>
-          </a:fillRef>
-          <a:effectRef idx="2">
-            <a:schemeClr val="accent1"/>
-          </a:effectRef>
-          <a:fontRef idx="minor">
-            <a:schemeClr val="lt1"/>
-          </a:fontRef>
-        </p:style>
-        <p:txBody>
-          <a:bodyPr rtlCol="0" anchor="ctr"/>
-          <a:lstStyle/>
-          <a:p>
-            <a:pPr algn="ctr"/>
-          </a:p>
-        </p:txBody>
-      </p:sp>
-      <p:sp>
-        <p:nvSpPr>
-          <p:cNvPr id="6" name="Rounded Rectangle 5"/>
-          <p:cNvSpPr/>
-          <p:nvPr/>
-        </p:nvSpPr>
-        <p:spPr>
-          <a:xfrm>
-            <a:off x="9153144" y="1207008"/>
-            <a:ext cx="841248" cy="310896"/>
-          </a:xfrm>
-          <a:prstGeom prst="roundRect">
-            <a:avLst>
-              <a:gd name="adj" fmla="val 35000"/>
-            </a:avLst>
-          </a:prstGeom>
-          <a:solidFill>
-            <a:srgbClr val="E5F5FB"/>
-          </a:solidFill>
-          <a:ln>
-            <a:noFill/>
-          </a:ln>
-          <a:effectLst/>
-        </p:spPr>
-        <p:style>
-          <a:lnRef idx="1">
-            <a:schemeClr val="accent1"/>
-          </a:lnRef>
-          <a:fillRef idx="3">
-            <a:schemeClr val="accent1"/>
-          </a:fillRef>
-          <a:effectRef idx="2">
-            <a:schemeClr val="accent1"/>
-          </a:effectRef>
-          <a:fontRef idx="minor">
-            <a:schemeClr val="lt1"/>
-          </a:fontRef>
-        </p:style>
-        <p:txBody>
-          <a:bodyPr rtlCol="0" anchor="ctr"/>
-          <a:lstStyle/>
-          <a:p>
-            <a:pPr algn="ctr"/>
-          </a:p>
-        </p:txBody>
-      </p:sp>
-      <p:sp>
-        <p:nvSpPr>
-          <p:cNvPr id="7" name="Rounded Rectangle 6"/>
-          <p:cNvSpPr/>
-          <p:nvPr/>
-        </p:nvSpPr>
-        <p:spPr>
-          <a:xfrm>
-            <a:off x="10049256" y="1207008"/>
-            <a:ext cx="841248" cy="310896"/>
-          </a:xfrm>
-          <a:prstGeom prst="roundRect">
-            <a:avLst>
-              <a:gd name="adj" fmla="val 35000"/>
-            </a:avLst>
-          </a:prstGeom>
-          <a:solidFill>
-            <a:srgbClr val="E5F5FB"/>
-          </a:solidFill>
-          <a:ln>
-            <a:noFill/>
-          </a:ln>
-          <a:effectLst/>
-        </p:spPr>
-        <p:style>
-          <a:lnRef idx="1">
-            <a:schemeClr val="accent1"/>
-          </a:lnRef>
-          <a:fillRef idx="3">
-            <a:schemeClr val="accent1"/>
-          </a:fillRef>
-          <a:effectRef idx="2">
-            <a:schemeClr val="accent1"/>
-          </a:effectRef>
-          <a:fontRef idx="minor">
-            <a:schemeClr val="lt1"/>
-          </a:fontRef>
-        </p:style>
-        <p:txBody>
-          <a:bodyPr rtlCol="0" anchor="ctr"/>
-          <a:lstStyle/>
-          <a:p>
-            <a:pPr algn="ctr"/>
-          </a:p>
-        </p:txBody>
-      </p:sp>
-      <p:sp>
-        <p:nvSpPr>
-          <p:cNvPr id="8" name="Rounded Rectangle 7"/>
-          <p:cNvSpPr/>
-          <p:nvPr/>
-        </p:nvSpPr>
-        <p:spPr>
-          <a:xfrm>
-            <a:off x="658368" y="1600200"/>
-            <a:ext cx="10881360" cy="1417320"/>
-          </a:xfrm>
-          <a:prstGeom prst="roundRect">
-            <a:avLst>
-              <a:gd name="adj" fmla="val 4500"/>
-            </a:avLst>
-          </a:prstGeom>
-          <a:solidFill>
-            <a:srgbClr val="E5F5FB"/>
-          </a:solidFill>
-          <a:ln>
-            <a:noFill/>
-          </a:ln>
-          <a:effectLst/>
-        </p:spPr>
-        <p:style>
-          <a:lnRef idx="1">
-            <a:schemeClr val="accent1"/>
-          </a:lnRef>
-          <a:fillRef idx="3">
-            <a:schemeClr val="accent1"/>
-          </a:fillRef>
-          <a:effectRef idx="2">
-            <a:schemeClr val="accent1"/>
-          </a:effectRef>
-          <a:fontRef idx="minor">
-            <a:schemeClr val="lt1"/>
-          </a:fontRef>
-        </p:style>
-        <p:txBody>
-          <a:bodyPr rtlCol="0" anchor="ctr"/>
-          <a:lstStyle/>
-          <a:p>
-            <a:pPr algn="ctr"/>
-          </a:p>
-        </p:txBody>
-      </p:sp>
-      <p:sp>
-        <p:nvSpPr>
-          <p:cNvPr id="9" name="TextBox 8"/>
+              <a:t>Four layers. For each: one question, one deliverable, one mistake.</a:t>
+            </a:r>
+          </a:p>
+        </p:txBody>
+      </p:sp>
+      <p:sp>
+        <p:nvSpPr>
+          <p:cNvPr id="4" name="TextBox 3"/>
           <p:cNvSpPr txBox="1"/>
           <p:nvPr/>
         </p:nvSpPr>
         <p:spPr>
           <a:xfrm>
-            <a:off x="868680" y="1755648"/>
-            <a:ext cx="2286000" cy="365760"/>
+            <a:off x="1005840" y="3611880"/>
+            <a:ext cx="10149840" cy="2377440"/>
           </a:xfrm>
           <a:prstGeom prst="rect">
             <a:avLst/>
@@ -12799,283 +12121,58 @@
           </a:bodyPr>
           <a:lstStyle/>
           <a:p>
-            <a:r>
-              <a:rPr sz="1100" b="1" i="0">
+            <a:pPr>
+              <a:spcAft>
+                <a:spcPts val="800"/>
+              </a:spcAft>
+            </a:pPr>
+            <a:r>
+              <a:rPr sz="1700" b="0" i="0">
                 <a:solidFill>
-                  <a:srgbClr val="006E96"/>
+                  <a:srgbClr val="595959"/>
                 </a:solidFill>
                 <a:latin typeface="Arial"/>
               </a:rPr>
-              <a:t>QUESTION</a:t>
-            </a:r>
-          </a:p>
-        </p:txBody>
-      </p:sp>
-      <p:sp>
-        <p:nvSpPr>
-          <p:cNvPr id="10" name="TextBox 9"/>
-          <p:cNvSpPr txBox="1"/>
-          <p:nvPr/>
-        </p:nvSpPr>
-        <p:spPr>
-          <a:xfrm>
-            <a:off x="3200400" y="1728216"/>
-            <a:ext cx="8092440" cy="1143000"/>
-          </a:xfrm>
-          <a:prstGeom prst="rect">
-            <a:avLst/>
-          </a:prstGeom>
-          <a:noFill/>
-        </p:spPr>
-        <p:txBody>
-          <a:bodyPr wrap="square">
-            <a:spAutoFit/>
-          </a:bodyPr>
-          <a:lstStyle/>
-          <a:p>
-            <a:r>
-              <a:rPr sz="1800" b="0" i="0">
+              <a:t>Business · Data · Application · Technology</a:t>
+            </a:r>
+          </a:p>
+          <a:p>
+            <a:pPr>
+              <a:spcAft>
+                <a:spcPts val="800"/>
+              </a:spcAft>
+            </a:pPr>
+            <a:r>
+              <a:rPr sz="1700" b="0" i="0">
                 <a:solidFill>
-                  <a:srgbClr val="1A1A1A"/>
+                  <a:srgbClr val="595959"/>
                 </a:solidFill>
                 <a:latin typeface="Arial"/>
               </a:rPr>
-              <a:t>What does this body do, for whom, and how well?</a:t>
-            </a:r>
-          </a:p>
-        </p:txBody>
-      </p:sp>
-      <p:sp>
-        <p:nvSpPr>
-          <p:cNvPr id="11" name="Rounded Rectangle 10"/>
-          <p:cNvSpPr/>
-          <p:nvPr/>
-        </p:nvSpPr>
-        <p:spPr>
-          <a:xfrm>
-            <a:off x="658368" y="3172968"/>
-            <a:ext cx="10881360" cy="1417320"/>
-          </a:xfrm>
-          <a:prstGeom prst="roundRect">
-            <a:avLst>
-              <a:gd name="adj" fmla="val 4500"/>
-            </a:avLst>
-          </a:prstGeom>
-          <a:solidFill>
-            <a:srgbClr val="E5F5FB"/>
-          </a:solidFill>
-          <a:ln>
-            <a:noFill/>
-          </a:ln>
-          <a:effectLst/>
-        </p:spPr>
-        <p:style>
-          <a:lnRef idx="1">
-            <a:schemeClr val="accent1"/>
-          </a:lnRef>
-          <a:fillRef idx="3">
-            <a:schemeClr val="accent1"/>
-          </a:fillRef>
-          <a:effectRef idx="2">
-            <a:schemeClr val="accent1"/>
-          </a:effectRef>
-          <a:fontRef idx="minor">
-            <a:schemeClr val="lt1"/>
-          </a:fontRef>
-        </p:style>
-        <p:txBody>
-          <a:bodyPr rtlCol="0" anchor="ctr"/>
-          <a:lstStyle/>
-          <a:p>
-            <a:pPr algn="ctr"/>
-          </a:p>
-        </p:txBody>
-      </p:sp>
-      <p:sp>
-        <p:nvSpPr>
-          <p:cNvPr id="12" name="TextBox 11"/>
-          <p:cNvSpPr txBox="1"/>
-          <p:nvPr/>
-        </p:nvSpPr>
-        <p:spPr>
-          <a:xfrm>
-            <a:off x="868680" y="3328415"/>
-            <a:ext cx="2286000" cy="365760"/>
-          </a:xfrm>
-          <a:prstGeom prst="rect">
-            <a:avLst/>
-          </a:prstGeom>
-          <a:noFill/>
-        </p:spPr>
-        <p:txBody>
-          <a:bodyPr wrap="square">
-            <a:spAutoFit/>
-          </a:bodyPr>
-          <a:lstStyle/>
-          <a:p>
-            <a:r>
-              <a:rPr sz="1100" b="1" i="0">
+              <a:t>The question the layer answers. The deliverable you produce.</a:t>
+            </a:r>
+          </a:p>
+          <a:p>
+            <a:pPr>
+              <a:spcAft>
+                <a:spcPts val="800"/>
+              </a:spcAft>
+            </a:pPr>
+            <a:r>
+              <a:rPr sz="1700" b="0" i="0">
                 <a:solidFill>
-                  <a:srgbClr val="006E96"/>
+                  <a:srgbClr val="595959"/>
                 </a:solidFill>
                 <a:latin typeface="Arial"/>
               </a:rPr>
-              <a:t>DELIVERABLE</a:t>
-            </a:r>
-          </a:p>
-        </p:txBody>
-      </p:sp>
-      <p:sp>
-        <p:nvSpPr>
-          <p:cNvPr id="13" name="TextBox 12"/>
-          <p:cNvSpPr txBox="1"/>
-          <p:nvPr/>
-        </p:nvSpPr>
-        <p:spPr>
-          <a:xfrm>
-            <a:off x="3200400" y="3300984"/>
-            <a:ext cx="8092440" cy="1143000"/>
-          </a:xfrm>
-          <a:prstGeom prst="rect">
-            <a:avLst/>
-          </a:prstGeom>
-          <a:noFill/>
-        </p:spPr>
-        <p:txBody>
-          <a:bodyPr wrap="square">
-            <a:spAutoFit/>
-          </a:bodyPr>
-          <a:lstStyle/>
-          <a:p>
-            <a:r>
-              <a:rPr sz="1800" b="0" i="0">
-                <a:solidFill>
-                  <a:srgbClr val="1A1A1A"/>
-                </a:solidFill>
-                <a:latin typeface="Arial"/>
-              </a:rPr>
-              <a:t>A capability map and a service catalogue.</a:t>
-            </a:r>
-          </a:p>
-        </p:txBody>
-      </p:sp>
-      <p:sp>
-        <p:nvSpPr>
-          <p:cNvPr id="14" name="Rounded Rectangle 13"/>
-          <p:cNvSpPr/>
-          <p:nvPr/>
-        </p:nvSpPr>
-        <p:spPr>
-          <a:xfrm>
-            <a:off x="658368" y="4745736"/>
-            <a:ext cx="10881360" cy="1417320"/>
-          </a:xfrm>
-          <a:prstGeom prst="roundRect">
-            <a:avLst>
-              <a:gd name="adj" fmla="val 4500"/>
-            </a:avLst>
-          </a:prstGeom>
-          <a:solidFill>
-            <a:srgbClr val="009CD6"/>
-          </a:solidFill>
-          <a:ln>
-            <a:noFill/>
-          </a:ln>
-          <a:effectLst/>
-        </p:spPr>
-        <p:style>
-          <a:lnRef idx="1">
-            <a:schemeClr val="accent1"/>
-          </a:lnRef>
-          <a:fillRef idx="3">
-            <a:schemeClr val="accent1"/>
-          </a:fillRef>
-          <a:effectRef idx="2">
-            <a:schemeClr val="accent1"/>
-          </a:effectRef>
-          <a:fontRef idx="minor">
-            <a:schemeClr val="lt1"/>
-          </a:fontRef>
-        </p:style>
-        <p:txBody>
-          <a:bodyPr rtlCol="0" anchor="ctr"/>
-          <a:lstStyle/>
-          <a:p>
-            <a:pPr algn="ctr"/>
-          </a:p>
-        </p:txBody>
-      </p:sp>
-      <p:sp>
-        <p:nvSpPr>
-          <p:cNvPr id="15" name="TextBox 14"/>
-          <p:cNvSpPr txBox="1"/>
-          <p:nvPr/>
-        </p:nvSpPr>
-        <p:spPr>
-          <a:xfrm>
-            <a:off x="868680" y="4901183"/>
-            <a:ext cx="2286000" cy="365760"/>
-          </a:xfrm>
-          <a:prstGeom prst="rect">
-            <a:avLst/>
-          </a:prstGeom>
-          <a:noFill/>
-        </p:spPr>
-        <p:txBody>
-          <a:bodyPr wrap="square">
-            <a:spAutoFit/>
-          </a:bodyPr>
-          <a:lstStyle/>
-          <a:p>
-            <a:r>
-              <a:rPr sz="1100" b="1" i="0">
-                <a:solidFill>
-                  <a:srgbClr val="FFFFFF"/>
-                </a:solidFill>
-                <a:latin typeface="Arial"/>
-              </a:rPr>
-              <a:t>MISTAKE</a:t>
-            </a:r>
-          </a:p>
-        </p:txBody>
-      </p:sp>
-      <p:sp>
-        <p:nvSpPr>
-          <p:cNvPr id="16" name="TextBox 15"/>
-          <p:cNvSpPr txBox="1"/>
-          <p:nvPr/>
-        </p:nvSpPr>
-        <p:spPr>
-          <a:xfrm>
-            <a:off x="3200400" y="4873751"/>
-            <a:ext cx="8092440" cy="1143000"/>
-          </a:xfrm>
-          <a:prstGeom prst="rect">
-            <a:avLst/>
-          </a:prstGeom>
-          <a:noFill/>
-        </p:spPr>
-        <p:txBody>
-          <a:bodyPr wrap="square">
-            <a:spAutoFit/>
-          </a:bodyPr>
-          <a:lstStyle/>
-          <a:p>
-            <a:r>
-              <a:rPr sz="1800" b="0" i="0">
-                <a:solidFill>
-                  <a:srgbClr val="FFFFFF"/>
-                </a:solidFill>
-                <a:latin typeface="Arial"/>
-              </a:rPr>
-              <a:t>Copying the org chart instead of describing capabilities.</a:t>
-            </a:r>
-          </a:p>
-        </p:txBody>
-      </p:sp>
-      <p:sp>
-        <p:nvSpPr>
-          <p:cNvPr id="17" name="TextBox 16"/>
+              <a:t>The mistake that catches first-time architects.</a:t>
+            </a:r>
+          </a:p>
+        </p:txBody>
+      </p:sp>
+      <p:sp>
+        <p:nvSpPr>
+          <p:cNvPr id="5" name="TextBox 4"/>
           <p:cNvSpPr txBox="1"/>
           <p:nvPr/>
         </p:nvSpPr>
@@ -13103,6 +12200,41 @@
                 <a:latin typeface="Arial"/>
               </a:rPr>
               <a:t>2.1 · Read any government in four layers</a:t>
+            </a:r>
+          </a:p>
+        </p:txBody>
+      </p:sp>
+      <p:sp>
+        <p:nvSpPr>
+          <p:cNvPr id="6" name="TextBox 5"/>
+          <p:cNvSpPr txBox="1"/>
+          <p:nvPr/>
+        </p:nvSpPr>
+        <p:spPr>
+          <a:xfrm>
+            <a:off x="10058400" y="6473952"/>
+            <a:ext cx="1673352" cy="292608"/>
+          </a:xfrm>
+          <a:prstGeom prst="rect">
+            <a:avLst/>
+          </a:prstGeom>
+          <a:noFill/>
+        </p:spPr>
+        <p:txBody>
+          <a:bodyPr wrap="square">
+            <a:spAutoFit/>
+          </a:bodyPr>
+          <a:lstStyle/>
+          <a:p>
+            <a:pPr algn="r"/>
+            <a:r>
+              <a:rPr sz="900" b="0" i="0">
+                <a:solidFill>
+                  <a:srgbClr val="595959"/>
+                </a:solidFill>
+                <a:latin typeface="Arial"/>
+              </a:rPr>
+              <a:t>www.itu.int</a:t>
             </a:r>
           </a:p>
         </p:txBody>
@@ -13198,7 +12330,7 @@
                 </a:solidFill>
                 <a:latin typeface="Arial"/>
               </a:rPr>
-              <a:t>The Data layer outlasts every application above it</a:t>
+              <a:t>The Business layer describes what a body does — not how it is arranged</a:t>
             </a:r>
           </a:p>
         </p:txBody>
@@ -13212,6 +12344,52 @@
         <p:spPr>
           <a:xfrm>
             <a:off x="7360920" y="1207008"/>
+            <a:ext cx="841248" cy="310896"/>
+          </a:xfrm>
+          <a:prstGeom prst="roundRect">
+            <a:avLst>
+              <a:gd name="adj" fmla="val 35000"/>
+            </a:avLst>
+          </a:prstGeom>
+          <a:solidFill>
+            <a:srgbClr val="009CD6"/>
+          </a:solidFill>
+          <a:ln>
+            <a:noFill/>
+          </a:ln>
+          <a:effectLst/>
+        </p:spPr>
+        <p:style>
+          <a:lnRef idx="1">
+            <a:schemeClr val="accent1"/>
+          </a:lnRef>
+          <a:fillRef idx="3">
+            <a:schemeClr val="accent1"/>
+          </a:fillRef>
+          <a:effectRef idx="2">
+            <a:schemeClr val="accent1"/>
+          </a:effectRef>
+          <a:fontRef idx="minor">
+            <a:schemeClr val="lt1"/>
+          </a:fontRef>
+        </p:style>
+        <p:txBody>
+          <a:bodyPr rtlCol="0" anchor="ctr"/>
+          <a:lstStyle/>
+          <a:p>
+            <a:pPr algn="ctr"/>
+          </a:p>
+        </p:txBody>
+      </p:sp>
+      <p:sp>
+        <p:nvSpPr>
+          <p:cNvPr id="5" name="Rounded Rectangle 4"/>
+          <p:cNvSpPr/>
+          <p:nvPr/>
+        </p:nvSpPr>
+        <p:spPr>
+          <a:xfrm>
+            <a:off x="8257032" y="1207008"/>
             <a:ext cx="841248" cy="310896"/>
           </a:xfrm>
           <a:prstGeom prst="roundRect">
@@ -13251,52 +12429,6 @@
       </p:sp>
       <p:sp>
         <p:nvSpPr>
-          <p:cNvPr id="5" name="Rounded Rectangle 4"/>
-          <p:cNvSpPr/>
-          <p:nvPr/>
-        </p:nvSpPr>
-        <p:spPr>
-          <a:xfrm>
-            <a:off x="8257032" y="1207008"/>
-            <a:ext cx="841248" cy="310896"/>
-          </a:xfrm>
-          <a:prstGeom prst="roundRect">
-            <a:avLst>
-              <a:gd name="adj" fmla="val 35000"/>
-            </a:avLst>
-          </a:prstGeom>
-          <a:solidFill>
-            <a:srgbClr val="009CD6"/>
-          </a:solidFill>
-          <a:ln>
-            <a:noFill/>
-          </a:ln>
-          <a:effectLst/>
-        </p:spPr>
-        <p:style>
-          <a:lnRef idx="1">
-            <a:schemeClr val="accent1"/>
-          </a:lnRef>
-          <a:fillRef idx="3">
-            <a:schemeClr val="accent1"/>
-          </a:fillRef>
-          <a:effectRef idx="2">
-            <a:schemeClr val="accent1"/>
-          </a:effectRef>
-          <a:fontRef idx="minor">
-            <a:schemeClr val="lt1"/>
-          </a:fontRef>
-        </p:style>
-        <p:txBody>
-          <a:bodyPr rtlCol="0" anchor="ctr"/>
-          <a:lstStyle/>
-          <a:p>
-            <a:pPr algn="ctr"/>
-          </a:p>
-        </p:txBody>
-      </p:sp>
-      <p:sp>
-        <p:nvSpPr>
           <p:cNvPr id="6" name="Rounded Rectangle 5"/>
           <p:cNvSpPr/>
           <p:nvPr/>
@@ -13496,7 +12628,7 @@
                 </a:solidFill>
                 <a:latin typeface="Arial"/>
               </a:rPr>
-              <a:t>What information does the body hold, who owns it, where is the authoritative copy?</a:t>
+              <a:t>What does this body do, for whom, and how well?</a:t>
             </a:r>
           </a:p>
         </p:txBody>
@@ -13610,7 +12742,7 @@
                 </a:solidFill>
                 <a:latin typeface="Arial"/>
               </a:rPr>
-              <a:t>A data-domain catalogue with one owner per domain.</a:t>
+              <a:t>A capability map and a service catalogue.</a:t>
             </a:r>
           </a:p>
         </p:txBody>
@@ -13724,7 +12856,7 @@
                 </a:solidFill>
                 <a:latin typeface="Arial"/>
               </a:rPr>
-              <a:t>Listing databases instead of data domains.</a:t>
+              <a:t>Copying the org chart instead of describing capabilities.</a:t>
             </a:r>
           </a:p>
         </p:txBody>
@@ -13854,7 +12986,7 @@
                 </a:solidFill>
                 <a:latin typeface="Arial"/>
               </a:rPr>
-              <a:t>An application portfolio tells you why a system exists; an inventory does not</a:t>
+              <a:t>The Data layer outlasts every application above it</a:t>
             </a:r>
           </a:p>
         </p:txBody>
@@ -13922,52 +13054,6 @@
             </a:avLst>
           </a:prstGeom>
           <a:solidFill>
-            <a:srgbClr val="E5F5FB"/>
-          </a:solidFill>
-          <a:ln>
-            <a:noFill/>
-          </a:ln>
-          <a:effectLst/>
-        </p:spPr>
-        <p:style>
-          <a:lnRef idx="1">
-            <a:schemeClr val="accent1"/>
-          </a:lnRef>
-          <a:fillRef idx="3">
-            <a:schemeClr val="accent1"/>
-          </a:fillRef>
-          <a:effectRef idx="2">
-            <a:schemeClr val="accent1"/>
-          </a:effectRef>
-          <a:fontRef idx="minor">
-            <a:schemeClr val="lt1"/>
-          </a:fontRef>
-        </p:style>
-        <p:txBody>
-          <a:bodyPr rtlCol="0" anchor="ctr"/>
-          <a:lstStyle/>
-          <a:p>
-            <a:pPr algn="ctr"/>
-          </a:p>
-        </p:txBody>
-      </p:sp>
-      <p:sp>
-        <p:nvSpPr>
-          <p:cNvPr id="6" name="Rounded Rectangle 5"/>
-          <p:cNvSpPr/>
-          <p:nvPr/>
-        </p:nvSpPr>
-        <p:spPr>
-          <a:xfrm>
-            <a:off x="9153144" y="1207008"/>
-            <a:ext cx="841248" cy="310896"/>
-          </a:xfrm>
-          <a:prstGeom prst="roundRect">
-            <a:avLst>
-              <a:gd name="adj" fmla="val 35000"/>
-            </a:avLst>
-          </a:prstGeom>
-          <a:solidFill>
             <a:srgbClr val="009CD6"/>
           </a:solidFill>
           <a:ln>
@@ -13999,13 +13085,13 @@
       </p:sp>
       <p:sp>
         <p:nvSpPr>
-          <p:cNvPr id="7" name="Rounded Rectangle 6"/>
+          <p:cNvPr id="6" name="Rounded Rectangle 5"/>
           <p:cNvSpPr/>
           <p:nvPr/>
         </p:nvSpPr>
         <p:spPr>
           <a:xfrm>
-            <a:off x="10049256" y="1207008"/>
+            <a:off x="9153144" y="1207008"/>
             <a:ext cx="841248" cy="310896"/>
           </a:xfrm>
           <a:prstGeom prst="roundRect">
@@ -14045,6 +13131,52 @@
       </p:sp>
       <p:sp>
         <p:nvSpPr>
+          <p:cNvPr id="7" name="Rounded Rectangle 6"/>
+          <p:cNvSpPr/>
+          <p:nvPr/>
+        </p:nvSpPr>
+        <p:spPr>
+          <a:xfrm>
+            <a:off x="10049256" y="1207008"/>
+            <a:ext cx="841248" cy="310896"/>
+          </a:xfrm>
+          <a:prstGeom prst="roundRect">
+            <a:avLst>
+              <a:gd name="adj" fmla="val 35000"/>
+            </a:avLst>
+          </a:prstGeom>
+          <a:solidFill>
+            <a:srgbClr val="E5F5FB"/>
+          </a:solidFill>
+          <a:ln>
+            <a:noFill/>
+          </a:ln>
+          <a:effectLst/>
+        </p:spPr>
+        <p:style>
+          <a:lnRef idx="1">
+            <a:schemeClr val="accent1"/>
+          </a:lnRef>
+          <a:fillRef idx="3">
+            <a:schemeClr val="accent1"/>
+          </a:fillRef>
+          <a:effectRef idx="2">
+            <a:schemeClr val="accent1"/>
+          </a:effectRef>
+          <a:fontRef idx="minor">
+            <a:schemeClr val="lt1"/>
+          </a:fontRef>
+        </p:style>
+        <p:txBody>
+          <a:bodyPr rtlCol="0" anchor="ctr"/>
+          <a:lstStyle/>
+          <a:p>
+            <a:pPr algn="ctr"/>
+          </a:p>
+        </p:txBody>
+      </p:sp>
+      <p:sp>
+        <p:nvSpPr>
           <p:cNvPr id="8" name="Rounded Rectangle 7"/>
           <p:cNvSpPr/>
           <p:nvPr/>
@@ -14152,7 +13284,7 @@
                 </a:solidFill>
                 <a:latin typeface="Arial"/>
               </a:rPr>
-              <a:t>What software supports the work, and which capability does each one serve?</a:t>
+              <a:t>What information does the body hold, who owns it, where is the authoritative copy?</a:t>
             </a:r>
           </a:p>
         </p:txBody>
@@ -14266,7 +13398,7 @@
                 </a:solidFill>
                 <a:latin typeface="Arial"/>
               </a:rPr>
-              <a:t>An application portfolio mapped to capabilities and data domains.</a:t>
+              <a:t>A data-domain catalogue with one owner per domain.</a:t>
             </a:r>
           </a:p>
         </p:txBody>
@@ -14380,7 +13512,7 @@
                 </a:solidFill>
                 <a:latin typeface="Arial"/>
               </a:rPr>
-              <a:t>A software inventory with no link to the business.</a:t>
+              <a:t>Listing databases instead of data domains.</a:t>
             </a:r>
           </a:p>
         </p:txBody>
@@ -14510,7 +13642,7 @@
                 </a:solidFill>
                 <a:latin typeface="Arial"/>
               </a:rPr>
-              <a:t>On the Technology layer, the mistake runs the other way — too deep, too early</a:t>
+              <a:t>An application portfolio tells you why a system exists; an inventory does not</a:t>
             </a:r>
           </a:p>
         </p:txBody>
@@ -14624,7 +13756,7 @@
             </a:avLst>
           </a:prstGeom>
           <a:solidFill>
-            <a:srgbClr val="E5F5FB"/>
+            <a:srgbClr val="009CD6"/>
           </a:solidFill>
           <a:ln>
             <a:noFill/>
@@ -14670,7 +13802,7 @@
             </a:avLst>
           </a:prstGeom>
           <a:solidFill>
-            <a:srgbClr val="009CD6"/>
+            <a:srgbClr val="E5F5FB"/>
           </a:solidFill>
           <a:ln>
             <a:noFill/>
@@ -14808,7 +13940,7 @@
                 </a:solidFill>
                 <a:latin typeface="Arial"/>
               </a:rPr>
-              <a:t>What does everything run on?</a:t>
+              <a:t>What software supports the work, and which capability does each one serve?</a:t>
             </a:r>
           </a:p>
         </p:txBody>
@@ -14922,7 +14054,7 @@
                 </a:solidFill>
                 <a:latin typeface="Arial"/>
               </a:rPr>
-              <a:t>A short list of technology standards and a simple infrastructure picture.</a:t>
+              <a:t>An application portfolio mapped to capabilities and data domains.</a:t>
             </a:r>
           </a:p>
         </p:txBody>
@@ -15036,7 +14168,7 @@
                 </a:solidFill>
                 <a:latin typeface="Arial"/>
               </a:rPr>
-              <a:t>Going too deep, too early.</a:t>
+              <a:t>A software inventory with no link to the business.</a:t>
             </a:r>
           </a:p>
         </p:txBody>
@@ -15166,7 +14298,7 @@
                 </a:solidFill>
                 <a:latin typeface="Arial"/>
               </a:rPr>
-              <a:t>The layers connect downward</a:t>
+              <a:t>On the Technology layer, the mistake runs the other way — too deep, too early</a:t>
             </a:r>
           </a:p>
         </p:txBody>
@@ -15179,8 +14311,192 @@
         </p:nvSpPr>
         <p:spPr>
           <a:xfrm>
-            <a:off x="1371600" y="1371600"/>
-            <a:ext cx="9509760" cy="438912"/>
+            <a:off x="7360920" y="1207008"/>
+            <a:ext cx="841248" cy="310896"/>
+          </a:xfrm>
+          <a:prstGeom prst="roundRect">
+            <a:avLst>
+              <a:gd name="adj" fmla="val 35000"/>
+            </a:avLst>
+          </a:prstGeom>
+          <a:solidFill>
+            <a:srgbClr val="E5F5FB"/>
+          </a:solidFill>
+          <a:ln>
+            <a:noFill/>
+          </a:ln>
+          <a:effectLst/>
+        </p:spPr>
+        <p:style>
+          <a:lnRef idx="1">
+            <a:schemeClr val="accent1"/>
+          </a:lnRef>
+          <a:fillRef idx="3">
+            <a:schemeClr val="accent1"/>
+          </a:fillRef>
+          <a:effectRef idx="2">
+            <a:schemeClr val="accent1"/>
+          </a:effectRef>
+          <a:fontRef idx="minor">
+            <a:schemeClr val="lt1"/>
+          </a:fontRef>
+        </p:style>
+        <p:txBody>
+          <a:bodyPr rtlCol="0" anchor="ctr"/>
+          <a:lstStyle/>
+          <a:p>
+            <a:pPr algn="ctr"/>
+          </a:p>
+        </p:txBody>
+      </p:sp>
+      <p:sp>
+        <p:nvSpPr>
+          <p:cNvPr id="5" name="Rounded Rectangle 4"/>
+          <p:cNvSpPr/>
+          <p:nvPr/>
+        </p:nvSpPr>
+        <p:spPr>
+          <a:xfrm>
+            <a:off x="8257032" y="1207008"/>
+            <a:ext cx="841248" cy="310896"/>
+          </a:xfrm>
+          <a:prstGeom prst="roundRect">
+            <a:avLst>
+              <a:gd name="adj" fmla="val 35000"/>
+            </a:avLst>
+          </a:prstGeom>
+          <a:solidFill>
+            <a:srgbClr val="E5F5FB"/>
+          </a:solidFill>
+          <a:ln>
+            <a:noFill/>
+          </a:ln>
+          <a:effectLst/>
+        </p:spPr>
+        <p:style>
+          <a:lnRef idx="1">
+            <a:schemeClr val="accent1"/>
+          </a:lnRef>
+          <a:fillRef idx="3">
+            <a:schemeClr val="accent1"/>
+          </a:fillRef>
+          <a:effectRef idx="2">
+            <a:schemeClr val="accent1"/>
+          </a:effectRef>
+          <a:fontRef idx="minor">
+            <a:schemeClr val="lt1"/>
+          </a:fontRef>
+        </p:style>
+        <p:txBody>
+          <a:bodyPr rtlCol="0" anchor="ctr"/>
+          <a:lstStyle/>
+          <a:p>
+            <a:pPr algn="ctr"/>
+          </a:p>
+        </p:txBody>
+      </p:sp>
+      <p:sp>
+        <p:nvSpPr>
+          <p:cNvPr id="6" name="Rounded Rectangle 5"/>
+          <p:cNvSpPr/>
+          <p:nvPr/>
+        </p:nvSpPr>
+        <p:spPr>
+          <a:xfrm>
+            <a:off x="9153144" y="1207008"/>
+            <a:ext cx="841248" cy="310896"/>
+          </a:xfrm>
+          <a:prstGeom prst="roundRect">
+            <a:avLst>
+              <a:gd name="adj" fmla="val 35000"/>
+            </a:avLst>
+          </a:prstGeom>
+          <a:solidFill>
+            <a:srgbClr val="E5F5FB"/>
+          </a:solidFill>
+          <a:ln>
+            <a:noFill/>
+          </a:ln>
+          <a:effectLst/>
+        </p:spPr>
+        <p:style>
+          <a:lnRef idx="1">
+            <a:schemeClr val="accent1"/>
+          </a:lnRef>
+          <a:fillRef idx="3">
+            <a:schemeClr val="accent1"/>
+          </a:fillRef>
+          <a:effectRef idx="2">
+            <a:schemeClr val="accent1"/>
+          </a:effectRef>
+          <a:fontRef idx="minor">
+            <a:schemeClr val="lt1"/>
+          </a:fontRef>
+        </p:style>
+        <p:txBody>
+          <a:bodyPr rtlCol="0" anchor="ctr"/>
+          <a:lstStyle/>
+          <a:p>
+            <a:pPr algn="ctr"/>
+          </a:p>
+        </p:txBody>
+      </p:sp>
+      <p:sp>
+        <p:nvSpPr>
+          <p:cNvPr id="7" name="Rounded Rectangle 6"/>
+          <p:cNvSpPr/>
+          <p:nvPr/>
+        </p:nvSpPr>
+        <p:spPr>
+          <a:xfrm>
+            <a:off x="10049256" y="1207008"/>
+            <a:ext cx="841248" cy="310896"/>
+          </a:xfrm>
+          <a:prstGeom prst="roundRect">
+            <a:avLst>
+              <a:gd name="adj" fmla="val 35000"/>
+            </a:avLst>
+          </a:prstGeom>
+          <a:solidFill>
+            <a:srgbClr val="009CD6"/>
+          </a:solidFill>
+          <a:ln>
+            <a:noFill/>
+          </a:ln>
+          <a:effectLst/>
+        </p:spPr>
+        <p:style>
+          <a:lnRef idx="1">
+            <a:schemeClr val="accent1"/>
+          </a:lnRef>
+          <a:fillRef idx="3">
+            <a:schemeClr val="accent1"/>
+          </a:fillRef>
+          <a:effectRef idx="2">
+            <a:schemeClr val="accent1"/>
+          </a:effectRef>
+          <a:fontRef idx="minor">
+            <a:schemeClr val="lt1"/>
+          </a:fontRef>
+        </p:style>
+        <p:txBody>
+          <a:bodyPr rtlCol="0" anchor="ctr"/>
+          <a:lstStyle/>
+          <a:p>
+            <a:pPr algn="ctr"/>
+          </a:p>
+        </p:txBody>
+      </p:sp>
+      <p:sp>
+        <p:nvSpPr>
+          <p:cNvPr id="8" name="Rounded Rectangle 7"/>
+          <p:cNvSpPr/>
+          <p:nvPr/>
+        </p:nvSpPr>
+        <p:spPr>
+          <a:xfrm>
+            <a:off x="658368" y="1600200"/>
+            <a:ext cx="10881360" cy="1417320"/>
           </a:xfrm>
           <a:prstGeom prst="roundRect">
             <a:avLst>
@@ -15219,14 +14535,14 @@
       </p:sp>
       <p:sp>
         <p:nvSpPr>
-          <p:cNvPr id="5" name="TextBox 4"/>
+          <p:cNvPr id="9" name="TextBox 8"/>
           <p:cNvSpPr txBox="1"/>
           <p:nvPr/>
         </p:nvSpPr>
         <p:spPr>
           <a:xfrm>
-            <a:off x="1572768" y="1408176"/>
-            <a:ext cx="2103120" cy="365759"/>
+            <a:off x="868680" y="1755648"/>
+            <a:ext cx="2286000" cy="365760"/>
           </a:xfrm>
           <a:prstGeom prst="rect">
             <a:avLst/>
@@ -15234,33 +14550,33 @@
           <a:noFill/>
         </p:spPr>
         <p:txBody>
-          <a:bodyPr wrap="square" anchor="ctr">
+          <a:bodyPr wrap="square">
             <a:spAutoFit/>
           </a:bodyPr>
           <a:lstStyle/>
           <a:p>
             <a:r>
-              <a:rPr sz="1200" b="1" i="0">
+              <a:rPr sz="1100" b="1" i="0">
                 <a:solidFill>
                   <a:srgbClr val="006E96"/>
                 </a:solidFill>
                 <a:latin typeface="Arial"/>
               </a:rPr>
-              <a:t>SERVICE</a:t>
-            </a:r>
-          </a:p>
-        </p:txBody>
-      </p:sp>
-      <p:sp>
-        <p:nvSpPr>
-          <p:cNvPr id="6" name="TextBox 5"/>
+              <a:t>QUESTION</a:t>
+            </a:r>
+          </a:p>
+        </p:txBody>
+      </p:sp>
+      <p:sp>
+        <p:nvSpPr>
+          <p:cNvPr id="10" name="TextBox 9"/>
           <p:cNvSpPr txBox="1"/>
           <p:nvPr/>
         </p:nvSpPr>
         <p:spPr>
           <a:xfrm>
-            <a:off x="3675887" y="1408176"/>
-            <a:ext cx="7004304" cy="365759"/>
+            <a:off x="3200400" y="1728216"/>
+            <a:ext cx="8092440" cy="1143000"/>
           </a:xfrm>
           <a:prstGeom prst="rect">
             <a:avLst/>
@@ -15268,77 +14584,33 @@
           <a:noFill/>
         </p:spPr>
         <p:txBody>
-          <a:bodyPr wrap="square" anchor="ctr">
+          <a:bodyPr wrap="square">
             <a:spAutoFit/>
           </a:bodyPr>
           <a:lstStyle/>
           <a:p>
             <a:r>
-              <a:rPr sz="1500" b="0" i="0">
+              <a:rPr sz="1800" b="0" i="0">
                 <a:solidFill>
                   <a:srgbClr val="1A1A1A"/>
                 </a:solidFill>
                 <a:latin typeface="Arial"/>
               </a:rPr>
-              <a:t>What a citizen or another body receives</a:t>
-            </a:r>
-          </a:p>
-        </p:txBody>
-      </p:sp>
-      <p:sp>
-        <p:nvSpPr>
-          <p:cNvPr id="7" name="Diamond 6"/>
+              <a:t>What does everything run on?</a:t>
+            </a:r>
+          </a:p>
+        </p:txBody>
+      </p:sp>
+      <p:sp>
+        <p:nvSpPr>
+          <p:cNvPr id="11" name="Rounded Rectangle 10"/>
           <p:cNvSpPr/>
           <p:nvPr/>
         </p:nvSpPr>
         <p:spPr>
           <a:xfrm>
-            <a:off x="6062472" y="1819656"/>
-            <a:ext cx="128016" cy="128016"/>
-          </a:xfrm>
-          <a:prstGeom prst="diamond">
-            <a:avLst/>
-          </a:prstGeom>
-          <a:solidFill>
-            <a:srgbClr val="BFBFBF"/>
-          </a:solidFill>
-          <a:ln>
-            <a:noFill/>
-          </a:ln>
-          <a:effectLst/>
-        </p:spPr>
-        <p:style>
-          <a:lnRef idx="1">
-            <a:schemeClr val="accent1"/>
-          </a:lnRef>
-          <a:fillRef idx="3">
-            <a:schemeClr val="accent1"/>
-          </a:fillRef>
-          <a:effectRef idx="2">
-            <a:schemeClr val="accent1"/>
-          </a:effectRef>
-          <a:fontRef idx="minor">
-            <a:schemeClr val="lt1"/>
-          </a:fontRef>
-        </p:style>
-        <p:txBody>
-          <a:bodyPr rtlCol="0" anchor="ctr"/>
-          <a:lstStyle/>
-          <a:p>
-            <a:pPr algn="ctr"/>
-          </a:p>
-        </p:txBody>
-      </p:sp>
-      <p:sp>
-        <p:nvSpPr>
-          <p:cNvPr id="8" name="Rounded Rectangle 7"/>
-          <p:cNvSpPr/>
-          <p:nvPr/>
-        </p:nvSpPr>
-        <p:spPr>
-          <a:xfrm>
-            <a:off x="1371600" y="1956816"/>
-            <a:ext cx="9509760" cy="438912"/>
+            <a:off x="658368" y="3172968"/>
+            <a:ext cx="10881360" cy="1417320"/>
           </a:xfrm>
           <a:prstGeom prst="roundRect">
             <a:avLst>
@@ -15377,14 +14649,14 @@
       </p:sp>
       <p:sp>
         <p:nvSpPr>
-          <p:cNvPr id="9" name="TextBox 8"/>
+          <p:cNvPr id="12" name="TextBox 11"/>
           <p:cNvSpPr txBox="1"/>
           <p:nvPr/>
         </p:nvSpPr>
         <p:spPr>
           <a:xfrm>
-            <a:off x="1572768" y="1993392"/>
-            <a:ext cx="2103120" cy="365759"/>
+            <a:off x="868680" y="3328415"/>
+            <a:ext cx="2286000" cy="365760"/>
           </a:xfrm>
           <a:prstGeom prst="rect">
             <a:avLst/>
@@ -15392,33 +14664,33 @@
           <a:noFill/>
         </p:spPr>
         <p:txBody>
-          <a:bodyPr wrap="square" anchor="ctr">
+          <a:bodyPr wrap="square">
             <a:spAutoFit/>
           </a:bodyPr>
           <a:lstStyle/>
           <a:p>
             <a:r>
-              <a:rPr sz="1200" b="1" i="0">
+              <a:rPr sz="1100" b="1" i="0">
                 <a:solidFill>
                   <a:srgbClr val="006E96"/>
                 </a:solidFill>
                 <a:latin typeface="Arial"/>
               </a:rPr>
-              <a:t>CAPABILITY</a:t>
-            </a:r>
-          </a:p>
-        </p:txBody>
-      </p:sp>
-      <p:sp>
-        <p:nvSpPr>
-          <p:cNvPr id="10" name="TextBox 9"/>
+              <a:t>DELIVERABLE</a:t>
+            </a:r>
+          </a:p>
+        </p:txBody>
+      </p:sp>
+      <p:sp>
+        <p:nvSpPr>
+          <p:cNvPr id="13" name="TextBox 12"/>
           <p:cNvSpPr txBox="1"/>
           <p:nvPr/>
         </p:nvSpPr>
         <p:spPr>
           <a:xfrm>
-            <a:off x="3675887" y="1993392"/>
-            <a:ext cx="7004304" cy="365759"/>
+            <a:off x="3200400" y="3300984"/>
+            <a:ext cx="8092440" cy="1143000"/>
           </a:xfrm>
           <a:prstGeom prst="rect">
             <a:avLst/>
@@ -15426,77 +14698,33 @@
           <a:noFill/>
         </p:spPr>
         <p:txBody>
-          <a:bodyPr wrap="square" anchor="ctr">
+          <a:bodyPr wrap="square">
             <a:spAutoFit/>
           </a:bodyPr>
           <a:lstStyle/>
           <a:p>
             <a:r>
-              <a:rPr sz="1500" b="0" i="0">
+              <a:rPr sz="1800" b="0" i="0">
                 <a:solidFill>
                   <a:srgbClr val="1A1A1A"/>
                 </a:solidFill>
                 <a:latin typeface="Arial"/>
               </a:rPr>
-              <a:t>Business — what the body can do</a:t>
-            </a:r>
-          </a:p>
-        </p:txBody>
-      </p:sp>
-      <p:sp>
-        <p:nvSpPr>
-          <p:cNvPr id="11" name="Diamond 10"/>
+              <a:t>A short list of technology standards and a simple infrastructure picture.</a:t>
+            </a:r>
+          </a:p>
+        </p:txBody>
+      </p:sp>
+      <p:sp>
+        <p:nvSpPr>
+          <p:cNvPr id="14" name="Rounded Rectangle 13"/>
           <p:cNvSpPr/>
           <p:nvPr/>
         </p:nvSpPr>
         <p:spPr>
           <a:xfrm>
-            <a:off x="6062472" y="2404872"/>
-            <a:ext cx="128016" cy="128016"/>
-          </a:xfrm>
-          <a:prstGeom prst="diamond">
-            <a:avLst/>
-          </a:prstGeom>
-          <a:solidFill>
-            <a:srgbClr val="BFBFBF"/>
-          </a:solidFill>
-          <a:ln>
-            <a:noFill/>
-          </a:ln>
-          <a:effectLst/>
-        </p:spPr>
-        <p:style>
-          <a:lnRef idx="1">
-            <a:schemeClr val="accent1"/>
-          </a:lnRef>
-          <a:fillRef idx="3">
-            <a:schemeClr val="accent1"/>
-          </a:fillRef>
-          <a:effectRef idx="2">
-            <a:schemeClr val="accent1"/>
-          </a:effectRef>
-          <a:fontRef idx="minor">
-            <a:schemeClr val="lt1"/>
-          </a:fontRef>
-        </p:style>
-        <p:txBody>
-          <a:bodyPr rtlCol="0" anchor="ctr"/>
-          <a:lstStyle/>
-          <a:p>
-            <a:pPr algn="ctr"/>
-          </a:p>
-        </p:txBody>
-      </p:sp>
-      <p:sp>
-        <p:nvSpPr>
-          <p:cNvPr id="12" name="Rounded Rectangle 11"/>
-          <p:cNvSpPr/>
-          <p:nvPr/>
-        </p:nvSpPr>
-        <p:spPr>
-          <a:xfrm>
-            <a:off x="1371600" y="2542032"/>
-            <a:ext cx="9509760" cy="438912"/>
+            <a:off x="658368" y="4745736"/>
+            <a:ext cx="10881360" cy="1417320"/>
           </a:xfrm>
           <a:prstGeom prst="roundRect">
             <a:avLst>
@@ -15504,7 +14732,7 @@
             </a:avLst>
           </a:prstGeom>
           <a:solidFill>
-            <a:srgbClr val="E5F5FB"/>
+            <a:srgbClr val="009CD6"/>
           </a:solidFill>
           <a:ln>
             <a:noFill/>
@@ -15535,14 +14763,14 @@
       </p:sp>
       <p:sp>
         <p:nvSpPr>
-          <p:cNvPr id="13" name="TextBox 12"/>
+          <p:cNvPr id="15" name="TextBox 14"/>
           <p:cNvSpPr txBox="1"/>
           <p:nvPr/>
         </p:nvSpPr>
         <p:spPr>
           <a:xfrm>
-            <a:off x="1572768" y="2578608"/>
-            <a:ext cx="2103120" cy="365759"/>
+            <a:off x="868680" y="4901183"/>
+            <a:ext cx="2286000" cy="365760"/>
           </a:xfrm>
           <a:prstGeom prst="rect">
             <a:avLst/>
@@ -15550,349 +14778,33 @@
           <a:noFill/>
         </p:spPr>
         <p:txBody>
-          <a:bodyPr wrap="square" anchor="ctr">
+          <a:bodyPr wrap="square">
             <a:spAutoFit/>
           </a:bodyPr>
           <a:lstStyle/>
           <a:p>
             <a:r>
-              <a:rPr sz="1200" b="1" i="0">
-                <a:solidFill>
-                  <a:srgbClr val="006E96"/>
-                </a:solidFill>
-                <a:latin typeface="Arial"/>
-              </a:rPr>
-              <a:t>APPLICATION</a:t>
-            </a:r>
-          </a:p>
-        </p:txBody>
-      </p:sp>
-      <p:sp>
-        <p:nvSpPr>
-          <p:cNvPr id="14" name="TextBox 13"/>
-          <p:cNvSpPr txBox="1"/>
-          <p:nvPr/>
-        </p:nvSpPr>
-        <p:spPr>
-          <a:xfrm>
-            <a:off x="3675887" y="2578608"/>
-            <a:ext cx="7004304" cy="365759"/>
-          </a:xfrm>
-          <a:prstGeom prst="rect">
-            <a:avLst/>
-          </a:prstGeom>
-          <a:noFill/>
-        </p:spPr>
-        <p:txBody>
-          <a:bodyPr wrap="square" anchor="ctr">
-            <a:spAutoFit/>
-          </a:bodyPr>
-          <a:lstStyle/>
-          <a:p>
-            <a:r>
-              <a:rPr sz="1500" b="0" i="0">
-                <a:solidFill>
-                  <a:srgbClr val="1A1A1A"/>
-                </a:solidFill>
-                <a:latin typeface="Arial"/>
-              </a:rPr>
-              <a:t>The software that supports the capability</a:t>
-            </a:r>
-          </a:p>
-        </p:txBody>
-      </p:sp>
-      <p:sp>
-        <p:nvSpPr>
-          <p:cNvPr id="15" name="Diamond 14"/>
-          <p:cNvSpPr/>
-          <p:nvPr/>
-        </p:nvSpPr>
-        <p:spPr>
-          <a:xfrm>
-            <a:off x="6062472" y="2990088"/>
-            <a:ext cx="128016" cy="128016"/>
-          </a:xfrm>
-          <a:prstGeom prst="diamond">
-            <a:avLst/>
-          </a:prstGeom>
-          <a:solidFill>
-            <a:srgbClr val="BFBFBF"/>
-          </a:solidFill>
-          <a:ln>
-            <a:noFill/>
-          </a:ln>
-          <a:effectLst/>
-        </p:spPr>
-        <p:style>
-          <a:lnRef idx="1">
-            <a:schemeClr val="accent1"/>
-          </a:lnRef>
-          <a:fillRef idx="3">
-            <a:schemeClr val="accent1"/>
-          </a:fillRef>
-          <a:effectRef idx="2">
-            <a:schemeClr val="accent1"/>
-          </a:effectRef>
-          <a:fontRef idx="minor">
-            <a:schemeClr val="lt1"/>
-          </a:fontRef>
-        </p:style>
-        <p:txBody>
-          <a:bodyPr rtlCol="0" anchor="ctr"/>
-          <a:lstStyle/>
-          <a:p>
-            <a:pPr algn="ctr"/>
-          </a:p>
-        </p:txBody>
-      </p:sp>
-      <p:sp>
-        <p:nvSpPr>
-          <p:cNvPr id="16" name="Rounded Rectangle 15"/>
-          <p:cNvSpPr/>
-          <p:nvPr/>
-        </p:nvSpPr>
-        <p:spPr>
-          <a:xfrm>
-            <a:off x="1371600" y="3127248"/>
-            <a:ext cx="9509760" cy="438912"/>
-          </a:xfrm>
-          <a:prstGeom prst="roundRect">
-            <a:avLst>
-              <a:gd name="adj" fmla="val 4500"/>
-            </a:avLst>
-          </a:prstGeom>
-          <a:solidFill>
-            <a:srgbClr val="E5F5FB"/>
-          </a:solidFill>
-          <a:ln>
-            <a:noFill/>
-          </a:ln>
-          <a:effectLst/>
-        </p:spPr>
-        <p:style>
-          <a:lnRef idx="1">
-            <a:schemeClr val="accent1"/>
-          </a:lnRef>
-          <a:fillRef idx="3">
-            <a:schemeClr val="accent1"/>
-          </a:fillRef>
-          <a:effectRef idx="2">
-            <a:schemeClr val="accent1"/>
-          </a:effectRef>
-          <a:fontRef idx="minor">
-            <a:schemeClr val="lt1"/>
-          </a:fontRef>
-        </p:style>
-        <p:txBody>
-          <a:bodyPr rtlCol="0" anchor="ctr"/>
-          <a:lstStyle/>
-          <a:p>
-            <a:pPr algn="ctr"/>
-          </a:p>
-        </p:txBody>
-      </p:sp>
-      <p:sp>
-        <p:nvSpPr>
-          <p:cNvPr id="17" name="TextBox 16"/>
-          <p:cNvSpPr txBox="1"/>
-          <p:nvPr/>
-        </p:nvSpPr>
-        <p:spPr>
-          <a:xfrm>
-            <a:off x="1572768" y="3163824"/>
-            <a:ext cx="2103120" cy="365759"/>
-          </a:xfrm>
-          <a:prstGeom prst="rect">
-            <a:avLst/>
-          </a:prstGeom>
-          <a:noFill/>
-        </p:spPr>
-        <p:txBody>
-          <a:bodyPr wrap="square" anchor="ctr">
-            <a:spAutoFit/>
-          </a:bodyPr>
-          <a:lstStyle/>
-          <a:p>
-            <a:r>
-              <a:rPr sz="1200" b="1" i="0">
-                <a:solidFill>
-                  <a:srgbClr val="006E96"/>
-                </a:solidFill>
-                <a:latin typeface="Arial"/>
-              </a:rPr>
-              <a:t>DATA DOMAIN</a:t>
-            </a:r>
-          </a:p>
-        </p:txBody>
-      </p:sp>
-      <p:sp>
-        <p:nvSpPr>
-          <p:cNvPr id="18" name="TextBox 17"/>
-          <p:cNvSpPr txBox="1"/>
-          <p:nvPr/>
-        </p:nvSpPr>
-        <p:spPr>
-          <a:xfrm>
-            <a:off x="3675887" y="3163824"/>
-            <a:ext cx="7004304" cy="365759"/>
-          </a:xfrm>
-          <a:prstGeom prst="rect">
-            <a:avLst/>
-          </a:prstGeom>
-          <a:noFill/>
-        </p:spPr>
-        <p:txBody>
-          <a:bodyPr wrap="square" anchor="ctr">
-            <a:spAutoFit/>
-          </a:bodyPr>
-          <a:lstStyle/>
-          <a:p>
-            <a:r>
-              <a:rPr sz="1500" b="0" i="0">
-                <a:solidFill>
-                  <a:srgbClr val="1A1A1A"/>
-                </a:solidFill>
-                <a:latin typeface="Arial"/>
-              </a:rPr>
-              <a:t>The information it uses, one owner each</a:t>
-            </a:r>
-          </a:p>
-        </p:txBody>
-      </p:sp>
-      <p:sp>
-        <p:nvSpPr>
-          <p:cNvPr id="19" name="Diamond 18"/>
-          <p:cNvSpPr/>
-          <p:nvPr/>
-        </p:nvSpPr>
-        <p:spPr>
-          <a:xfrm>
-            <a:off x="6062472" y="3575304"/>
-            <a:ext cx="128016" cy="128016"/>
-          </a:xfrm>
-          <a:prstGeom prst="diamond">
-            <a:avLst/>
-          </a:prstGeom>
-          <a:solidFill>
-            <a:srgbClr val="BFBFBF"/>
-          </a:solidFill>
-          <a:ln>
-            <a:noFill/>
-          </a:ln>
-          <a:effectLst/>
-        </p:spPr>
-        <p:style>
-          <a:lnRef idx="1">
-            <a:schemeClr val="accent1"/>
-          </a:lnRef>
-          <a:fillRef idx="3">
-            <a:schemeClr val="accent1"/>
-          </a:fillRef>
-          <a:effectRef idx="2">
-            <a:schemeClr val="accent1"/>
-          </a:effectRef>
-          <a:fontRef idx="minor">
-            <a:schemeClr val="lt1"/>
-          </a:fontRef>
-        </p:style>
-        <p:txBody>
-          <a:bodyPr rtlCol="0" anchor="ctr"/>
-          <a:lstStyle/>
-          <a:p>
-            <a:pPr algn="ctr"/>
-          </a:p>
-        </p:txBody>
-      </p:sp>
-      <p:sp>
-        <p:nvSpPr>
-          <p:cNvPr id="20" name="Rounded Rectangle 19"/>
-          <p:cNvSpPr/>
-          <p:nvPr/>
-        </p:nvSpPr>
-        <p:spPr>
-          <a:xfrm>
-            <a:off x="1371600" y="3712464"/>
-            <a:ext cx="9509760" cy="438912"/>
-          </a:xfrm>
-          <a:prstGeom prst="roundRect">
-            <a:avLst>
-              <a:gd name="adj" fmla="val 4500"/>
-            </a:avLst>
-          </a:prstGeom>
-          <a:solidFill>
-            <a:srgbClr val="006E96"/>
-          </a:solidFill>
-          <a:ln>
-            <a:noFill/>
-          </a:ln>
-          <a:effectLst/>
-        </p:spPr>
-        <p:style>
-          <a:lnRef idx="1">
-            <a:schemeClr val="accent1"/>
-          </a:lnRef>
-          <a:fillRef idx="3">
-            <a:schemeClr val="accent1"/>
-          </a:fillRef>
-          <a:effectRef idx="2">
-            <a:schemeClr val="accent1"/>
-          </a:effectRef>
-          <a:fontRef idx="minor">
-            <a:schemeClr val="lt1"/>
-          </a:fontRef>
-        </p:style>
-        <p:txBody>
-          <a:bodyPr rtlCol="0" anchor="ctr"/>
-          <a:lstStyle/>
-          <a:p>
-            <a:pPr algn="ctr"/>
-          </a:p>
-        </p:txBody>
-      </p:sp>
-      <p:sp>
-        <p:nvSpPr>
-          <p:cNvPr id="21" name="TextBox 20"/>
-          <p:cNvSpPr txBox="1"/>
-          <p:nvPr/>
-        </p:nvSpPr>
-        <p:spPr>
-          <a:xfrm>
-            <a:off x="1572768" y="3749040"/>
-            <a:ext cx="2103120" cy="365759"/>
-          </a:xfrm>
-          <a:prstGeom prst="rect">
-            <a:avLst/>
-          </a:prstGeom>
-          <a:noFill/>
-        </p:spPr>
-        <p:txBody>
-          <a:bodyPr wrap="square" anchor="ctr">
-            <a:spAutoFit/>
-          </a:bodyPr>
-          <a:lstStyle/>
-          <a:p>
-            <a:r>
-              <a:rPr sz="1200" b="1" i="0">
+              <a:rPr sz="1100" b="1" i="0">
                 <a:solidFill>
                   <a:srgbClr val="FFFFFF"/>
                 </a:solidFill>
                 <a:latin typeface="Arial"/>
               </a:rPr>
-              <a:t>TECHNOLOGY</a:t>
-            </a:r>
-          </a:p>
-        </p:txBody>
-      </p:sp>
-      <p:sp>
-        <p:nvSpPr>
-          <p:cNvPr id="22" name="TextBox 21"/>
+              <a:t>MISTAKE</a:t>
+            </a:r>
+          </a:p>
+        </p:txBody>
+      </p:sp>
+      <p:sp>
+        <p:nvSpPr>
+          <p:cNvPr id="16" name="TextBox 15"/>
           <p:cNvSpPr txBox="1"/>
           <p:nvPr/>
         </p:nvSpPr>
         <p:spPr>
           <a:xfrm>
-            <a:off x="3675887" y="3749040"/>
-            <a:ext cx="7004304" cy="365759"/>
+            <a:off x="3200400" y="4873751"/>
+            <a:ext cx="8092440" cy="1143000"/>
           </a:xfrm>
           <a:prstGeom prst="rect">
             <a:avLst/>
@@ -15900,148 +14812,26 @@
           <a:noFill/>
         </p:spPr>
         <p:txBody>
-          <a:bodyPr wrap="square" anchor="ctr">
+          <a:bodyPr wrap="square">
             <a:spAutoFit/>
           </a:bodyPr>
           <a:lstStyle/>
           <a:p>
             <a:r>
-              <a:rPr sz="1500" b="0" i="0">
+              <a:rPr sz="1800" b="0" i="0">
                 <a:solidFill>
                   <a:srgbClr val="FFFFFF"/>
                 </a:solidFill>
                 <a:latin typeface="Arial"/>
               </a:rPr>
-              <a:t>What all of it runs on</a:t>
-            </a:r>
-          </a:p>
-        </p:txBody>
-      </p:sp>
-      <p:sp>
-        <p:nvSpPr>
-          <p:cNvPr id="23" name="TextBox 22"/>
-          <p:cNvSpPr txBox="1"/>
-          <p:nvPr/>
-        </p:nvSpPr>
-        <p:spPr>
-          <a:xfrm>
-            <a:off x="658368" y="4242816"/>
-            <a:ext cx="10881360" cy="384048"/>
-          </a:xfrm>
-          <a:prstGeom prst="rect">
-            <a:avLst/>
-          </a:prstGeom>
-          <a:noFill/>
-        </p:spPr>
-        <p:txBody>
-          <a:bodyPr wrap="square">
-            <a:spAutoFit/>
-          </a:bodyPr>
-          <a:lstStyle/>
-          <a:p>
-            <a:r>
-              <a:rPr sz="1500" b="1" i="0">
-                <a:solidFill>
-                  <a:srgbClr val="006E96"/>
-                </a:solidFill>
-                <a:latin typeface="Arial"/>
-              </a:rPr>
-              <a:t>Every element connects up and down. A layer that floats free is your first gap.</a:t>
-            </a:r>
-          </a:p>
-        </p:txBody>
-      </p:sp>
-      <p:sp>
-        <p:nvSpPr>
-          <p:cNvPr id="24" name="Rounded Rectangle 23"/>
-          <p:cNvSpPr/>
-          <p:nvPr/>
-        </p:nvSpPr>
-        <p:spPr>
-          <a:xfrm>
-            <a:off x="658368" y="4709160"/>
-            <a:ext cx="10881360" cy="1554480"/>
-          </a:xfrm>
-          <a:prstGeom prst="roundRect">
-            <a:avLst>
-              <a:gd name="adj" fmla="val 4500"/>
-            </a:avLst>
-          </a:prstGeom>
-          <a:solidFill>
-            <a:srgbClr val="FFFFFF"/>
-          </a:solidFill>
-          <a:ln w="9525">
-            <a:solidFill>
-              <a:srgbClr val="009CD6"/>
-            </a:solidFill>
-          </a:ln>
-          <a:effectLst/>
-        </p:spPr>
-        <p:style>
-          <a:lnRef idx="1">
-            <a:schemeClr val="accent1"/>
-          </a:lnRef>
-          <a:fillRef idx="3">
-            <a:schemeClr val="accent1"/>
-          </a:fillRef>
-          <a:effectRef idx="2">
-            <a:schemeClr val="accent1"/>
-          </a:effectRef>
-          <a:fontRef idx="minor">
-            <a:schemeClr val="lt1"/>
-          </a:fontRef>
-        </p:style>
-        <p:txBody>
-          <a:bodyPr rtlCol="0" anchor="ctr" wrap="square" lIns="228600" rIns="228600" tIns="109728" bIns="109728">
-            <a:noAutofit/>
-          </a:bodyPr>
-          <a:lstStyle/>
-          <a:p>
-            <a:pPr algn="l">
-              <a:spcAft>
-                <a:spcPts val="400"/>
-              </a:spcAft>
-            </a:pPr>
-            <a:r>
-              <a:rPr sz="1800" b="1" i="0">
-                <a:solidFill>
-                  <a:srgbClr val="006E96"/>
-                </a:solidFill>
-                <a:latin typeface="Arial"/>
-              </a:rPr>
-              <a:t>Do this on your own sector. </a:t>
-            </a:r>
-            <a:r>
-              <a:rPr sz="1800" b="1" i="0">
-                <a:solidFill>
-                  <a:srgbClr val="1A1A1A"/>
-                </a:solidFill>
-                <a:latin typeface="Arial"/>
-              </a:rPr>
-              <a:t>Generate a four-layer reading template for a ministry.</a:t>
-            </a:r>
-          </a:p>
-          <a:p>
-            <a:pPr algn="l">
-              <a:spcAft>
-                <a:spcPts val="400"/>
-              </a:spcAft>
-            </a:pPr>
-            <a:r>
-              <a:rPr sz="1800" b="0" i="0">
-                <a:solidFill>
-                  <a:srgbClr val="595959"/>
-                </a:solidFill>
-                <a:latin typeface="Arial"/>
-              </a:rPr>
-              <a:t>The prompt in the companion material gives you a four-section capture template ready to take into Discovery interviews. Before the next video.</a:t>
-            </a:r>
-          </a:p>
-        </p:txBody>
-      </p:sp>
-      <p:sp>
-        <p:nvSpPr>
-          <p:cNvPr id="25" name="TextBox 24"/>
+              <a:t>Going too deep, too early.</a:t>
+            </a:r>
+          </a:p>
+        </p:txBody>
+      </p:sp>
+      <p:sp>
+        <p:nvSpPr>
+          <p:cNvPr id="17" name="TextBox 16"/>
           <p:cNvSpPr txBox="1"/>
           <p:nvPr/>
         </p:nvSpPr>
@@ -16164,21 +14954,67 @@
                 </a:solidFill>
                 <a:latin typeface="Arial"/>
               </a:rPr>
-              <a:t>Sources</a:t>
-            </a:r>
-          </a:p>
-        </p:txBody>
-      </p:sp>
-      <p:sp>
-        <p:nvSpPr>
-          <p:cNvPr id="4" name="TextBox 3"/>
+              <a:t>The layers connect downward</a:t>
+            </a:r>
+          </a:p>
+        </p:txBody>
+      </p:sp>
+      <p:sp>
+        <p:nvSpPr>
+          <p:cNvPr id="4" name="Rounded Rectangle 3"/>
+          <p:cNvSpPr/>
+          <p:nvPr/>
+        </p:nvSpPr>
+        <p:spPr>
+          <a:xfrm>
+            <a:off x="1371600" y="1371600"/>
+            <a:ext cx="9509760" cy="438912"/>
+          </a:xfrm>
+          <a:prstGeom prst="roundRect">
+            <a:avLst>
+              <a:gd name="adj" fmla="val 4500"/>
+            </a:avLst>
+          </a:prstGeom>
+          <a:solidFill>
+            <a:srgbClr val="E5F5FB"/>
+          </a:solidFill>
+          <a:ln>
+            <a:noFill/>
+          </a:ln>
+          <a:effectLst/>
+        </p:spPr>
+        <p:style>
+          <a:lnRef idx="1">
+            <a:schemeClr val="accent1"/>
+          </a:lnRef>
+          <a:fillRef idx="3">
+            <a:schemeClr val="accent1"/>
+          </a:fillRef>
+          <a:effectRef idx="2">
+            <a:schemeClr val="accent1"/>
+          </a:effectRef>
+          <a:fontRef idx="minor">
+            <a:schemeClr val="lt1"/>
+          </a:fontRef>
+        </p:style>
+        <p:txBody>
+          <a:bodyPr rtlCol="0" anchor="ctr"/>
+          <a:lstStyle/>
+          <a:p>
+            <a:pPr algn="ctr"/>
+          </a:p>
+        </p:txBody>
+      </p:sp>
+      <p:sp>
+        <p:nvSpPr>
+          <p:cNvPr id="5" name="TextBox 4"/>
           <p:cNvSpPr txBox="1"/>
           <p:nvPr/>
         </p:nvSpPr>
         <p:spPr>
           <a:xfrm>
-            <a:off x="658368" y="1554480"/>
-            <a:ext cx="10789920" cy="3840480"/>
+            <a:off x="1572768" y="1408176"/>
+            <a:ext cx="2103120" cy="365759"/>
           </a:xfrm>
           <a:prstGeom prst="rect">
             <a:avLst/>
@@ -16186,54 +15022,315 @@
           <a:noFill/>
         </p:spPr>
         <p:txBody>
-          <a:bodyPr wrap="square">
+          <a:bodyPr wrap="square" anchor="ctr">
             <a:spAutoFit/>
           </a:bodyPr>
           <a:lstStyle/>
           <a:p>
-            <a:pPr>
-              <a:spcAft>
-                <a:spcPts val="1200"/>
-              </a:spcAft>
-            </a:pPr>
-            <a:r>
-              <a:rPr sz="1700" b="0" i="0">
+            <a:r>
+              <a:rPr sz="1200" b="1" i="0">
+                <a:solidFill>
+                  <a:srgbClr val="006E96"/>
+                </a:solidFill>
+                <a:latin typeface="Arial"/>
+              </a:rPr>
+              <a:t>SERVICE</a:t>
+            </a:r>
+          </a:p>
+        </p:txBody>
+      </p:sp>
+      <p:sp>
+        <p:nvSpPr>
+          <p:cNvPr id="6" name="TextBox 5"/>
+          <p:cNvSpPr txBox="1"/>
+          <p:nvPr/>
+        </p:nvSpPr>
+        <p:spPr>
+          <a:xfrm>
+            <a:off x="3675887" y="1408176"/>
+            <a:ext cx="7004304" cy="365759"/>
+          </a:xfrm>
+          <a:prstGeom prst="rect">
+            <a:avLst/>
+          </a:prstGeom>
+          <a:noFill/>
+        </p:spPr>
+        <p:txBody>
+          <a:bodyPr wrap="square" anchor="ctr">
+            <a:spAutoFit/>
+          </a:bodyPr>
+          <a:lstStyle/>
+          <a:p>
+            <a:r>
+              <a:rPr sz="1500" b="0" i="0">
                 <a:solidFill>
                   <a:srgbClr val="1A1A1A"/>
                 </a:solidFill>
                 <a:latin typeface="Arial"/>
               </a:rPr>
-              <a:t>•  PAERA v1.0 — Annex 2 (Metamodel)</a:t>
-            </a:r>
-          </a:p>
-          <a:p>
-            <a:pPr>
-              <a:spcAft>
-                <a:spcPts val="1200"/>
-              </a:spcAft>
-            </a:pPr>
-            <a:r>
-              <a:rPr sz="1700" b="0" i="0">
+              <a:t>What a citizen or another body receives</a:t>
+            </a:r>
+          </a:p>
+        </p:txBody>
+      </p:sp>
+      <p:sp>
+        <p:nvSpPr>
+          <p:cNvPr id="7" name="Diamond 6"/>
+          <p:cNvSpPr/>
+          <p:nvPr/>
+        </p:nvSpPr>
+        <p:spPr>
+          <a:xfrm>
+            <a:off x="6062472" y="1819656"/>
+            <a:ext cx="128016" cy="128016"/>
+          </a:xfrm>
+          <a:prstGeom prst="diamond">
+            <a:avLst/>
+          </a:prstGeom>
+          <a:solidFill>
+            <a:srgbClr val="BFBFBF"/>
+          </a:solidFill>
+          <a:ln>
+            <a:noFill/>
+          </a:ln>
+          <a:effectLst/>
+        </p:spPr>
+        <p:style>
+          <a:lnRef idx="1">
+            <a:schemeClr val="accent1"/>
+          </a:lnRef>
+          <a:fillRef idx="3">
+            <a:schemeClr val="accent1"/>
+          </a:fillRef>
+          <a:effectRef idx="2">
+            <a:schemeClr val="accent1"/>
+          </a:effectRef>
+          <a:fontRef idx="minor">
+            <a:schemeClr val="lt1"/>
+          </a:fontRef>
+        </p:style>
+        <p:txBody>
+          <a:bodyPr rtlCol="0" anchor="ctr"/>
+          <a:lstStyle/>
+          <a:p>
+            <a:pPr algn="ctr"/>
+          </a:p>
+        </p:txBody>
+      </p:sp>
+      <p:sp>
+        <p:nvSpPr>
+          <p:cNvPr id="8" name="Rounded Rectangle 7"/>
+          <p:cNvSpPr/>
+          <p:nvPr/>
+        </p:nvSpPr>
+        <p:spPr>
+          <a:xfrm>
+            <a:off x="1371600" y="1956816"/>
+            <a:ext cx="9509760" cy="438912"/>
+          </a:xfrm>
+          <a:prstGeom prst="roundRect">
+            <a:avLst>
+              <a:gd name="adj" fmla="val 4500"/>
+            </a:avLst>
+          </a:prstGeom>
+          <a:solidFill>
+            <a:srgbClr val="E5F5FB"/>
+          </a:solidFill>
+          <a:ln>
+            <a:noFill/>
+          </a:ln>
+          <a:effectLst/>
+        </p:spPr>
+        <p:style>
+          <a:lnRef idx="1">
+            <a:schemeClr val="accent1"/>
+          </a:lnRef>
+          <a:fillRef idx="3">
+            <a:schemeClr val="accent1"/>
+          </a:fillRef>
+          <a:effectRef idx="2">
+            <a:schemeClr val="accent1"/>
+          </a:effectRef>
+          <a:fontRef idx="minor">
+            <a:schemeClr val="lt1"/>
+          </a:fontRef>
+        </p:style>
+        <p:txBody>
+          <a:bodyPr rtlCol="0" anchor="ctr"/>
+          <a:lstStyle/>
+          <a:p>
+            <a:pPr algn="ctr"/>
+          </a:p>
+        </p:txBody>
+      </p:sp>
+      <p:sp>
+        <p:nvSpPr>
+          <p:cNvPr id="9" name="TextBox 8"/>
+          <p:cNvSpPr txBox="1"/>
+          <p:nvPr/>
+        </p:nvSpPr>
+        <p:spPr>
+          <a:xfrm>
+            <a:off x="1572768" y="1993392"/>
+            <a:ext cx="2103120" cy="365759"/>
+          </a:xfrm>
+          <a:prstGeom prst="rect">
+            <a:avLst/>
+          </a:prstGeom>
+          <a:noFill/>
+        </p:spPr>
+        <p:txBody>
+          <a:bodyPr wrap="square" anchor="ctr">
+            <a:spAutoFit/>
+          </a:bodyPr>
+          <a:lstStyle/>
+          <a:p>
+            <a:r>
+              <a:rPr sz="1200" b="1" i="0">
+                <a:solidFill>
+                  <a:srgbClr val="006E96"/>
+                </a:solidFill>
+                <a:latin typeface="Arial"/>
+              </a:rPr>
+              <a:t>CAPABILITY</a:t>
+            </a:r>
+          </a:p>
+        </p:txBody>
+      </p:sp>
+      <p:sp>
+        <p:nvSpPr>
+          <p:cNvPr id="10" name="TextBox 9"/>
+          <p:cNvSpPr txBox="1"/>
+          <p:nvPr/>
+        </p:nvSpPr>
+        <p:spPr>
+          <a:xfrm>
+            <a:off x="3675887" y="1993392"/>
+            <a:ext cx="7004304" cy="365759"/>
+          </a:xfrm>
+          <a:prstGeom prst="rect">
+            <a:avLst/>
+          </a:prstGeom>
+          <a:noFill/>
+        </p:spPr>
+        <p:txBody>
+          <a:bodyPr wrap="square" anchor="ctr">
+            <a:spAutoFit/>
+          </a:bodyPr>
+          <a:lstStyle/>
+          <a:p>
+            <a:r>
+              <a:rPr sz="1500" b="0" i="0">
                 <a:solidFill>
                   <a:srgbClr val="1A1A1A"/>
                 </a:solidFill>
                 <a:latin typeface="Arial"/>
               </a:rPr>
-              <a:t>•  PAERA v1.0 — §2.3 (Role of Enterprise Architecture)</a:t>
-            </a:r>
-          </a:p>
-        </p:txBody>
-      </p:sp>
-      <p:sp>
-        <p:nvSpPr>
-          <p:cNvPr id="5" name="TextBox 4"/>
+              <a:t>Business — what the body can do</a:t>
+            </a:r>
+          </a:p>
+        </p:txBody>
+      </p:sp>
+      <p:sp>
+        <p:nvSpPr>
+          <p:cNvPr id="11" name="Diamond 10"/>
+          <p:cNvSpPr/>
+          <p:nvPr/>
+        </p:nvSpPr>
+        <p:spPr>
+          <a:xfrm>
+            <a:off x="6062472" y="2404872"/>
+            <a:ext cx="128016" cy="128016"/>
+          </a:xfrm>
+          <a:prstGeom prst="diamond">
+            <a:avLst/>
+          </a:prstGeom>
+          <a:solidFill>
+            <a:srgbClr val="BFBFBF"/>
+          </a:solidFill>
+          <a:ln>
+            <a:noFill/>
+          </a:ln>
+          <a:effectLst/>
+        </p:spPr>
+        <p:style>
+          <a:lnRef idx="1">
+            <a:schemeClr val="accent1"/>
+          </a:lnRef>
+          <a:fillRef idx="3">
+            <a:schemeClr val="accent1"/>
+          </a:fillRef>
+          <a:effectRef idx="2">
+            <a:schemeClr val="accent1"/>
+          </a:effectRef>
+          <a:fontRef idx="minor">
+            <a:schemeClr val="lt1"/>
+          </a:fontRef>
+        </p:style>
+        <p:txBody>
+          <a:bodyPr rtlCol="0" anchor="ctr"/>
+          <a:lstStyle/>
+          <a:p>
+            <a:pPr algn="ctr"/>
+          </a:p>
+        </p:txBody>
+      </p:sp>
+      <p:sp>
+        <p:nvSpPr>
+          <p:cNvPr id="12" name="Rounded Rectangle 11"/>
+          <p:cNvSpPr/>
+          <p:nvPr/>
+        </p:nvSpPr>
+        <p:spPr>
+          <a:xfrm>
+            <a:off x="1371600" y="2542032"/>
+            <a:ext cx="9509760" cy="438912"/>
+          </a:xfrm>
+          <a:prstGeom prst="roundRect">
+            <a:avLst>
+              <a:gd name="adj" fmla="val 4500"/>
+            </a:avLst>
+          </a:prstGeom>
+          <a:solidFill>
+            <a:srgbClr val="E5F5FB"/>
+          </a:solidFill>
+          <a:ln>
+            <a:noFill/>
+          </a:ln>
+          <a:effectLst/>
+        </p:spPr>
+        <p:style>
+          <a:lnRef idx="1">
+            <a:schemeClr val="accent1"/>
+          </a:lnRef>
+          <a:fillRef idx="3">
+            <a:schemeClr val="accent1"/>
+          </a:fillRef>
+          <a:effectRef idx="2">
+            <a:schemeClr val="accent1"/>
+          </a:effectRef>
+          <a:fontRef idx="minor">
+            <a:schemeClr val="lt1"/>
+          </a:fontRef>
+        </p:style>
+        <p:txBody>
+          <a:bodyPr rtlCol="0" anchor="ctr"/>
+          <a:lstStyle/>
+          <a:p>
+            <a:pPr algn="ctr"/>
+          </a:p>
+        </p:txBody>
+      </p:sp>
+      <p:sp>
+        <p:nvSpPr>
+          <p:cNvPr id="13" name="TextBox 12"/>
           <p:cNvSpPr txBox="1"/>
           <p:nvPr/>
         </p:nvSpPr>
         <p:spPr>
           <a:xfrm>
-            <a:off x="658368" y="5806440"/>
-            <a:ext cx="10789920" cy="457200"/>
+            <a:off x="1572768" y="2578608"/>
+            <a:ext cx="2103120" cy="365759"/>
           </a:xfrm>
           <a:prstGeom prst="rect">
             <a:avLst/>
@@ -16241,26 +15338,498 @@
           <a:noFill/>
         </p:spPr>
         <p:txBody>
-          <a:bodyPr wrap="square">
+          <a:bodyPr wrap="square" anchor="ctr">
             <a:spAutoFit/>
           </a:bodyPr>
           <a:lstStyle/>
           <a:p>
             <a:r>
-              <a:rPr sz="1400" b="1" i="0">
+              <a:rPr sz="1200" b="1" i="0">
                 <a:solidFill>
                   <a:srgbClr val="006E96"/>
                 </a:solidFill>
                 <a:latin typeface="Arial"/>
               </a:rPr>
-              <a:t>Find the link in the description.</a:t>
-            </a:r>
-          </a:p>
-        </p:txBody>
-      </p:sp>
-      <p:sp>
-        <p:nvSpPr>
-          <p:cNvPr id="6" name="TextBox 5"/>
+              <a:t>APPLICATION</a:t>
+            </a:r>
+          </a:p>
+        </p:txBody>
+      </p:sp>
+      <p:sp>
+        <p:nvSpPr>
+          <p:cNvPr id="14" name="TextBox 13"/>
+          <p:cNvSpPr txBox="1"/>
+          <p:nvPr/>
+        </p:nvSpPr>
+        <p:spPr>
+          <a:xfrm>
+            <a:off x="3675887" y="2578608"/>
+            <a:ext cx="7004304" cy="365759"/>
+          </a:xfrm>
+          <a:prstGeom prst="rect">
+            <a:avLst/>
+          </a:prstGeom>
+          <a:noFill/>
+        </p:spPr>
+        <p:txBody>
+          <a:bodyPr wrap="square" anchor="ctr">
+            <a:spAutoFit/>
+          </a:bodyPr>
+          <a:lstStyle/>
+          <a:p>
+            <a:r>
+              <a:rPr sz="1500" b="0" i="0">
+                <a:solidFill>
+                  <a:srgbClr val="1A1A1A"/>
+                </a:solidFill>
+                <a:latin typeface="Arial"/>
+              </a:rPr>
+              <a:t>The software that supports the capability</a:t>
+            </a:r>
+          </a:p>
+        </p:txBody>
+      </p:sp>
+      <p:sp>
+        <p:nvSpPr>
+          <p:cNvPr id="15" name="Diamond 14"/>
+          <p:cNvSpPr/>
+          <p:nvPr/>
+        </p:nvSpPr>
+        <p:spPr>
+          <a:xfrm>
+            <a:off x="6062472" y="2990088"/>
+            <a:ext cx="128016" cy="128016"/>
+          </a:xfrm>
+          <a:prstGeom prst="diamond">
+            <a:avLst/>
+          </a:prstGeom>
+          <a:solidFill>
+            <a:srgbClr val="BFBFBF"/>
+          </a:solidFill>
+          <a:ln>
+            <a:noFill/>
+          </a:ln>
+          <a:effectLst/>
+        </p:spPr>
+        <p:style>
+          <a:lnRef idx="1">
+            <a:schemeClr val="accent1"/>
+          </a:lnRef>
+          <a:fillRef idx="3">
+            <a:schemeClr val="accent1"/>
+          </a:fillRef>
+          <a:effectRef idx="2">
+            <a:schemeClr val="accent1"/>
+          </a:effectRef>
+          <a:fontRef idx="minor">
+            <a:schemeClr val="lt1"/>
+          </a:fontRef>
+        </p:style>
+        <p:txBody>
+          <a:bodyPr rtlCol="0" anchor="ctr"/>
+          <a:lstStyle/>
+          <a:p>
+            <a:pPr algn="ctr"/>
+          </a:p>
+        </p:txBody>
+      </p:sp>
+      <p:sp>
+        <p:nvSpPr>
+          <p:cNvPr id="16" name="Rounded Rectangle 15"/>
+          <p:cNvSpPr/>
+          <p:nvPr/>
+        </p:nvSpPr>
+        <p:spPr>
+          <a:xfrm>
+            <a:off x="1371600" y="3127248"/>
+            <a:ext cx="9509760" cy="438912"/>
+          </a:xfrm>
+          <a:prstGeom prst="roundRect">
+            <a:avLst>
+              <a:gd name="adj" fmla="val 4500"/>
+            </a:avLst>
+          </a:prstGeom>
+          <a:solidFill>
+            <a:srgbClr val="E5F5FB"/>
+          </a:solidFill>
+          <a:ln>
+            <a:noFill/>
+          </a:ln>
+          <a:effectLst/>
+        </p:spPr>
+        <p:style>
+          <a:lnRef idx="1">
+            <a:schemeClr val="accent1"/>
+          </a:lnRef>
+          <a:fillRef idx="3">
+            <a:schemeClr val="accent1"/>
+          </a:fillRef>
+          <a:effectRef idx="2">
+            <a:schemeClr val="accent1"/>
+          </a:effectRef>
+          <a:fontRef idx="minor">
+            <a:schemeClr val="lt1"/>
+          </a:fontRef>
+        </p:style>
+        <p:txBody>
+          <a:bodyPr rtlCol="0" anchor="ctr"/>
+          <a:lstStyle/>
+          <a:p>
+            <a:pPr algn="ctr"/>
+          </a:p>
+        </p:txBody>
+      </p:sp>
+      <p:sp>
+        <p:nvSpPr>
+          <p:cNvPr id="17" name="TextBox 16"/>
+          <p:cNvSpPr txBox="1"/>
+          <p:nvPr/>
+        </p:nvSpPr>
+        <p:spPr>
+          <a:xfrm>
+            <a:off x="1572768" y="3163824"/>
+            <a:ext cx="2103120" cy="365759"/>
+          </a:xfrm>
+          <a:prstGeom prst="rect">
+            <a:avLst/>
+          </a:prstGeom>
+          <a:noFill/>
+        </p:spPr>
+        <p:txBody>
+          <a:bodyPr wrap="square" anchor="ctr">
+            <a:spAutoFit/>
+          </a:bodyPr>
+          <a:lstStyle/>
+          <a:p>
+            <a:r>
+              <a:rPr sz="1200" b="1" i="0">
+                <a:solidFill>
+                  <a:srgbClr val="006E96"/>
+                </a:solidFill>
+                <a:latin typeface="Arial"/>
+              </a:rPr>
+              <a:t>DATA DOMAIN</a:t>
+            </a:r>
+          </a:p>
+        </p:txBody>
+      </p:sp>
+      <p:sp>
+        <p:nvSpPr>
+          <p:cNvPr id="18" name="TextBox 17"/>
+          <p:cNvSpPr txBox="1"/>
+          <p:nvPr/>
+        </p:nvSpPr>
+        <p:spPr>
+          <a:xfrm>
+            <a:off x="3675887" y="3163824"/>
+            <a:ext cx="7004304" cy="365759"/>
+          </a:xfrm>
+          <a:prstGeom prst="rect">
+            <a:avLst/>
+          </a:prstGeom>
+          <a:noFill/>
+        </p:spPr>
+        <p:txBody>
+          <a:bodyPr wrap="square" anchor="ctr">
+            <a:spAutoFit/>
+          </a:bodyPr>
+          <a:lstStyle/>
+          <a:p>
+            <a:r>
+              <a:rPr sz="1500" b="0" i="0">
+                <a:solidFill>
+                  <a:srgbClr val="1A1A1A"/>
+                </a:solidFill>
+                <a:latin typeface="Arial"/>
+              </a:rPr>
+              <a:t>The information it uses, one owner each</a:t>
+            </a:r>
+          </a:p>
+        </p:txBody>
+      </p:sp>
+      <p:sp>
+        <p:nvSpPr>
+          <p:cNvPr id="19" name="Diamond 18"/>
+          <p:cNvSpPr/>
+          <p:nvPr/>
+        </p:nvSpPr>
+        <p:spPr>
+          <a:xfrm>
+            <a:off x="6062472" y="3575304"/>
+            <a:ext cx="128016" cy="128016"/>
+          </a:xfrm>
+          <a:prstGeom prst="diamond">
+            <a:avLst/>
+          </a:prstGeom>
+          <a:solidFill>
+            <a:srgbClr val="BFBFBF"/>
+          </a:solidFill>
+          <a:ln>
+            <a:noFill/>
+          </a:ln>
+          <a:effectLst/>
+        </p:spPr>
+        <p:style>
+          <a:lnRef idx="1">
+            <a:schemeClr val="accent1"/>
+          </a:lnRef>
+          <a:fillRef idx="3">
+            <a:schemeClr val="accent1"/>
+          </a:fillRef>
+          <a:effectRef idx="2">
+            <a:schemeClr val="accent1"/>
+          </a:effectRef>
+          <a:fontRef idx="minor">
+            <a:schemeClr val="lt1"/>
+          </a:fontRef>
+        </p:style>
+        <p:txBody>
+          <a:bodyPr rtlCol="0" anchor="ctr"/>
+          <a:lstStyle/>
+          <a:p>
+            <a:pPr algn="ctr"/>
+          </a:p>
+        </p:txBody>
+      </p:sp>
+      <p:sp>
+        <p:nvSpPr>
+          <p:cNvPr id="20" name="Rounded Rectangle 19"/>
+          <p:cNvSpPr/>
+          <p:nvPr/>
+        </p:nvSpPr>
+        <p:spPr>
+          <a:xfrm>
+            <a:off x="1371600" y="3712464"/>
+            <a:ext cx="9509760" cy="438912"/>
+          </a:xfrm>
+          <a:prstGeom prst="roundRect">
+            <a:avLst>
+              <a:gd name="adj" fmla="val 4500"/>
+            </a:avLst>
+          </a:prstGeom>
+          <a:solidFill>
+            <a:srgbClr val="006E96"/>
+          </a:solidFill>
+          <a:ln>
+            <a:noFill/>
+          </a:ln>
+          <a:effectLst/>
+        </p:spPr>
+        <p:style>
+          <a:lnRef idx="1">
+            <a:schemeClr val="accent1"/>
+          </a:lnRef>
+          <a:fillRef idx="3">
+            <a:schemeClr val="accent1"/>
+          </a:fillRef>
+          <a:effectRef idx="2">
+            <a:schemeClr val="accent1"/>
+          </a:effectRef>
+          <a:fontRef idx="minor">
+            <a:schemeClr val="lt1"/>
+          </a:fontRef>
+        </p:style>
+        <p:txBody>
+          <a:bodyPr rtlCol="0" anchor="ctr"/>
+          <a:lstStyle/>
+          <a:p>
+            <a:pPr algn="ctr"/>
+          </a:p>
+        </p:txBody>
+      </p:sp>
+      <p:sp>
+        <p:nvSpPr>
+          <p:cNvPr id="21" name="TextBox 20"/>
+          <p:cNvSpPr txBox="1"/>
+          <p:nvPr/>
+        </p:nvSpPr>
+        <p:spPr>
+          <a:xfrm>
+            <a:off x="1572768" y="3749040"/>
+            <a:ext cx="2103120" cy="365759"/>
+          </a:xfrm>
+          <a:prstGeom prst="rect">
+            <a:avLst/>
+          </a:prstGeom>
+          <a:noFill/>
+        </p:spPr>
+        <p:txBody>
+          <a:bodyPr wrap="square" anchor="ctr">
+            <a:spAutoFit/>
+          </a:bodyPr>
+          <a:lstStyle/>
+          <a:p>
+            <a:r>
+              <a:rPr sz="1200" b="1" i="0">
+                <a:solidFill>
+                  <a:srgbClr val="FFFFFF"/>
+                </a:solidFill>
+                <a:latin typeface="Arial"/>
+              </a:rPr>
+              <a:t>TECHNOLOGY</a:t>
+            </a:r>
+          </a:p>
+        </p:txBody>
+      </p:sp>
+      <p:sp>
+        <p:nvSpPr>
+          <p:cNvPr id="22" name="TextBox 21"/>
+          <p:cNvSpPr txBox="1"/>
+          <p:nvPr/>
+        </p:nvSpPr>
+        <p:spPr>
+          <a:xfrm>
+            <a:off x="3675887" y="3749040"/>
+            <a:ext cx="7004304" cy="365759"/>
+          </a:xfrm>
+          <a:prstGeom prst="rect">
+            <a:avLst/>
+          </a:prstGeom>
+          <a:noFill/>
+        </p:spPr>
+        <p:txBody>
+          <a:bodyPr wrap="square" anchor="ctr">
+            <a:spAutoFit/>
+          </a:bodyPr>
+          <a:lstStyle/>
+          <a:p>
+            <a:r>
+              <a:rPr sz="1500" b="0" i="0">
+                <a:solidFill>
+                  <a:srgbClr val="FFFFFF"/>
+                </a:solidFill>
+                <a:latin typeface="Arial"/>
+              </a:rPr>
+              <a:t>What all of it runs on</a:t>
+            </a:r>
+          </a:p>
+        </p:txBody>
+      </p:sp>
+      <p:sp>
+        <p:nvSpPr>
+          <p:cNvPr id="23" name="TextBox 22"/>
+          <p:cNvSpPr txBox="1"/>
+          <p:nvPr/>
+        </p:nvSpPr>
+        <p:spPr>
+          <a:xfrm>
+            <a:off x="658368" y="4242816"/>
+            <a:ext cx="10881360" cy="384048"/>
+          </a:xfrm>
+          <a:prstGeom prst="rect">
+            <a:avLst/>
+          </a:prstGeom>
+          <a:noFill/>
+        </p:spPr>
+        <p:txBody>
+          <a:bodyPr wrap="square">
+            <a:spAutoFit/>
+          </a:bodyPr>
+          <a:lstStyle/>
+          <a:p>
+            <a:r>
+              <a:rPr sz="1500" b="1" i="0">
+                <a:solidFill>
+                  <a:srgbClr val="006E96"/>
+                </a:solidFill>
+                <a:latin typeface="Arial"/>
+              </a:rPr>
+              <a:t>Every element connects up and down. A layer that floats free is your first gap.</a:t>
+            </a:r>
+          </a:p>
+        </p:txBody>
+      </p:sp>
+      <p:sp>
+        <p:nvSpPr>
+          <p:cNvPr id="24" name="Rounded Rectangle 23"/>
+          <p:cNvSpPr/>
+          <p:nvPr/>
+        </p:nvSpPr>
+        <p:spPr>
+          <a:xfrm>
+            <a:off x="658368" y="4709160"/>
+            <a:ext cx="10881360" cy="1554480"/>
+          </a:xfrm>
+          <a:prstGeom prst="roundRect">
+            <a:avLst>
+              <a:gd name="adj" fmla="val 4500"/>
+            </a:avLst>
+          </a:prstGeom>
+          <a:solidFill>
+            <a:srgbClr val="FFFFFF"/>
+          </a:solidFill>
+          <a:ln w="9525">
+            <a:solidFill>
+              <a:srgbClr val="009CD6"/>
+            </a:solidFill>
+          </a:ln>
+          <a:effectLst/>
+        </p:spPr>
+        <p:style>
+          <a:lnRef idx="1">
+            <a:schemeClr val="accent1"/>
+          </a:lnRef>
+          <a:fillRef idx="3">
+            <a:schemeClr val="accent1"/>
+          </a:fillRef>
+          <a:effectRef idx="2">
+            <a:schemeClr val="accent1"/>
+          </a:effectRef>
+          <a:fontRef idx="minor">
+            <a:schemeClr val="lt1"/>
+          </a:fontRef>
+        </p:style>
+        <p:txBody>
+          <a:bodyPr rtlCol="0" anchor="ctr" wrap="square" lIns="228600" rIns="228600" tIns="109728" bIns="109728">
+            <a:noAutofit/>
+          </a:bodyPr>
+          <a:lstStyle/>
+          <a:p>
+            <a:pPr algn="l">
+              <a:spcAft>
+                <a:spcPts val="400"/>
+              </a:spcAft>
+            </a:pPr>
+            <a:r>
+              <a:rPr sz="1800" b="1" i="0">
+                <a:solidFill>
+                  <a:srgbClr val="006E96"/>
+                </a:solidFill>
+                <a:latin typeface="Arial"/>
+              </a:rPr>
+              <a:t>Do this on your own sector. </a:t>
+            </a:r>
+            <a:r>
+              <a:rPr sz="1800" b="1" i="0">
+                <a:solidFill>
+                  <a:srgbClr val="1A1A1A"/>
+                </a:solidFill>
+                <a:latin typeface="Arial"/>
+              </a:rPr>
+              <a:t>Generate a four-layer reading template for a ministry.</a:t>
+            </a:r>
+          </a:p>
+          <a:p>
+            <a:pPr algn="l">
+              <a:spcAft>
+                <a:spcPts val="400"/>
+              </a:spcAft>
+            </a:pPr>
+            <a:r>
+              <a:rPr sz="1800" b="0" i="0">
+                <a:solidFill>
+                  <a:srgbClr val="595959"/>
+                </a:solidFill>
+                <a:latin typeface="Arial"/>
+              </a:rPr>
+              <a:t>The prompt in the companion material gives you a four-section capture template ready to take into Discovery interviews. Before the next video.</a:t>
+            </a:r>
+          </a:p>
+        </p:txBody>
+      </p:sp>
+      <p:sp>
+        <p:nvSpPr>
+          <p:cNvPr id="25" name="TextBox 24"/>
           <p:cNvSpPr txBox="1"/>
           <p:nvPr/>
         </p:nvSpPr>

--- a/10-Knowledge-Products/KP1-GEA/videos/module_2/en/decks/KP1_M2_2.1_Deck_v0.2.pptx
+++ b/10-Knowledge-Products/KP1-GEA/videos/module_2/en/decks/KP1_M2_2.1_Deck_v0.2.pptx
@@ -12008,7 +12008,7 @@
                 </a:solidFill>
                 <a:latin typeface="Arial"/>
               </a:rPr>
-              <a:t>~5 minutes · standalone video · voice-over on text slides</a:t>
+              <a:t>standalone video · voice-over on text slides</a:t>
             </a:r>
           </a:p>
         </p:txBody>

--- a/10-Knowledge-Products/KP1-GEA/videos/module_2/en/decks/KP1_M2_2.1_Deck_v0.2.pptx
+++ b/10-Knowledge-Products/KP1-GEA/videos/module_2/en/decks/KP1_M2_2.1_Deck_v0.2.pptx
@@ -11872,7 +11872,7 @@
                 </a:solidFill>
                 <a:latin typeface="Arial"/>
               </a:rPr>
-              <a:t>KP1 · MODULE 2 · VIDEO 2.1</a:t>
+              <a:t>MODULE 2 · VIDEO 2.1</a:t>
             </a:r>
           </a:p>
         </p:txBody>
